--- a/PSC_Panel_Deck.pptx
+++ b/PSC_Panel_Deck.pptx
@@ -20,9 +20,10 @@
     <p:sldId id="268" r:id="rId14"/>
     <p:sldId id="269" r:id="rId15"/>
     <p:sldId id="270" r:id="rId16"/>
+    <p:sldId id="271" r:id="rId17"/>
   </p:sldIdLst>
   <p:notesMasterIdLst>
-    <p:notesMasterId r:id="rId17"/>
+    <p:notesMasterId r:id="rId18"/>
   </p:notesMasterIdLst>
   <p:sldSz cx="12192000" cy="6858000"/>
   <p:notesSz cx="6858000" cy="12192000"/>
@@ -121,7 +122,7 @@
   <p:extLst>
     <p:ext uri="{521415D9-36F7-43E2-AB2F-B90AF26B5E84}">
       <p14:sectionLst xmlns:p14="http://schemas.microsoft.com/office/powerpoint/2010/main">
-        <p14:section name="Opening" id="{f57dbfe4-a14e-dc84-a69d-e3a97c18a6e0}">
+        <p14:section name="Opening" id="{36318cd7-f66f-7bfd-911e-2dd9c3c4c885}">
           <p14:sldIdLst>
             <p14:sldId id="256"/>
             <p14:sldId id="257"/>
@@ -129,7 +130,7 @@
             <p14:sldId id="259"/>
           </p14:sldIdLst>
         </p14:section>
-        <p14:section name="Build" id="{128992c1-b6ad-50d6-bf18-73ef73463bde}">
+        <p14:section name="Build" id="{2cbd5c96-fc3c-555f-47cd-84d1014d142f}">
           <p14:sldIdLst>
             <p14:sldId id="260"/>
             <p14:sldId id="261"/>
@@ -138,18 +139,19 @@
             <p14:sldId id="264"/>
           </p14:sldIdLst>
         </p14:section>
-        <p14:section name="Prove and ship" id="{74f6463f-4ea9-9f29-f687-5517d837d31b}">
+        <p14:section name="Prove and ship" id="{8707c70f-a86a-5d8e-2f37-034fbe4589a2}">
           <p14:sldIdLst>
             <p14:sldId id="265"/>
             <p14:sldId id="266"/>
             <p14:sldId id="267"/>
             <p14:sldId id="268"/>
+            <p14:sldId id="269"/>
           </p14:sldIdLst>
         </p14:section>
-        <p14:section name="Close" id="{af1af1c3-08f9-cd09-0052-9f5740287ac6}">
+        <p14:section name="Close" id="{21ffcf30-b3d1-6e8d-1181-0ec13b590568}">
           <p14:sldIdLst>
-            <p14:sldId id="269"/>
             <p14:sldId id="270"/>
+            <p14:sldId id="271"/>
           </p14:sldIdLst>
         </p14:section>
       </p14:sectionLst>
@@ -908,7 +910,7 @@
           <a:p>
             <a:r>
               <a:rPr lang="en-US" dirty="0"/>
-              <a:t>These are real issues I hit while building and testing, and they're exactly the kind of thing a deployed architect runs into on site. The checkpointer rejection only shows up when you serve the graph, not in unit runs. The subagent final-message problem is in LangChain's own docs as the common failure mode. The air-gap one matters for DoD customers: the embedding model downloads on first call, so it has to be baked into the image. And community packages are sunsetting, so I depended on the interface rather than the integration.</a:t>
+              <a:t>Architecture documentation slide. LangSmith self-hosted is six services on Kubernetes: the frontend serves the UI and routes API calls; the backend handles CRUD and trace queries; the platform backend handles auth and high-volume run ingestion; the ingest queue persists traces to ClickHouse asynchronously with retries; the playground proxies LLM calls; ACE runs code in a sandbox. External services: ClickHouse for traces and feedback, Postgres for operational data, Redis or Valkey for queuing and caching, blob storage for large payloads. Managed services are strongly recommended over in-cluster. Deployment is an optional add-on: a control plane plus Agent Servers, which have their own Postgres and Redis. Scalability: the write path is platform backend to Redis to ingest queue to ClickHouse, so scale platform-backend and queue replicas, ideally with KEDA on Redis backlog. The read path is backend to ClickHouse: scale backend replicas and move ClickHouse to a 3-node replicated cluster. Replica numbers are from LangChain's published example configurations, low to high load. Baseline cluster is about 16 vCPU and 64 GB. Agent Server: API servers scale request concurrency; queue workers times N_JOBS_PER_WORKER sets run concurrency.</a:t>
             </a:r>
             <a:endParaRPr lang="en-US" dirty="0"/>
           </a:p>
@@ -996,7 +998,7 @@
           <a:p>
             <a:r>
               <a:rPr lang="en-US" dirty="0"/>
-              <a:t>Demo order: Studio first because the pause-and-resume is the most tangible thing. Then the supervisor trace in LangSmith. Then the experiment comparison. Then back to the architecture slide for infrastructure questions. Backup if the network fails: the remediation flow runs fully offline except the plan step, and I have screenshots.</a:t>
+              <a:t>These are real issues I hit while building and testing, and they're exactly the kind of thing a deployed architect runs into on site. The checkpointer rejection only shows up when you serve the graph, not in unit runs. The subagent final-message problem is in LangChain's own docs as the common failure mode. The air-gap one matters for DoD customers: the embedding model downloads on first call, so it has to be baked into the image. And community packages are sunsetting, so I depended on the interface rather than the integration.</a:t>
             </a:r>
             <a:endParaRPr lang="en-US" dirty="0"/>
           </a:p>
@@ -1084,7 +1086,7 @@
           <a:p>
             <a:r>
               <a:rPr lang="en-US" dirty="0"/>
-              <a:t>Close by turning the project into the job: assess maturity, prove value on one workflow with a golden dataset, productionize with the right deployment shape and HA, then keep improving with online evals. That's the Professional Services motion. Then open for questions.</a:t>
+              <a:t>Demo order: Studio first because the pause-and-resume is the most tangible thing. Then the supervisor trace in LangSmith. Then the experiment comparison. Then back to the architecture slide for infrastructure questions. Backup if the network fails: the remediation flow runs fully offline except the plan step, and I have screenshots.</a:t>
             </a:r>
             <a:endParaRPr lang="en-US" dirty="0"/>
           </a:p>
@@ -1108,6 +1110,94 @@
             <a:fld id="{F7021451-1387-4CA6-816F-3879F97B5CBC}" type="slidenum">
               <a:rPr lang="en-US"/>
               <a:t>15</a:t>
+            </a:fld>
+            <a:endParaRPr lang="en-US"/>
+          </a:p>
+        </p:txBody>
+      </p:sp>
+    </p:spTree>
+    <p:extLst>
+      <p:ext uri="{BB962C8B-B14F-4D97-AF65-F5344CB8AC3E}">
+        <p14:creationId xmlns:p14="http://schemas.microsoft.com/office/powerpoint/2010/main" val="1024086991"/>
+      </p:ext>
+    </p:extLst>
+  </p:cSld>
+  <p:clrMapOvr>
+    <a:masterClrMapping/>
+  </p:clrMapOvr>
+</p:notes>
+</file>
+
+<file path=ppt/notesSlides/notesSlide16.xml><?xml version="1.0" encoding="utf-8"?>
+<p:notes xmlns:a="http://schemas.openxmlformats.org/drawingml/2006/main" xmlns:r="http://schemas.openxmlformats.org/officeDocument/2006/relationships" xmlns:p="http://schemas.openxmlformats.org/presentationml/2006/main">
+  <p:cSld>
+    <p:spTree>
+      <p:nvGrpSpPr>
+        <p:cNvPr id="1" name=""/>
+        <p:cNvGrpSpPr/>
+        <p:nvPr/>
+      </p:nvGrpSpPr>
+      <p:grpSpPr>
+        <a:xfrm>
+          <a:off x="0" y="0"/>
+          <a:ext cx="0" cy="0"/>
+          <a:chOff x="0" y="0"/>
+          <a:chExt cx="0" cy="0"/>
+        </a:xfrm>
+      </p:grpSpPr>
+      <p:sp>
+        <p:nvSpPr>
+          <p:cNvPr id="2" name="Slide Image Placeholder 1"/>
+          <p:cNvSpPr>
+            <a:spLocks noGrp="1" noRot="1" noChangeAspect="1"/>
+          </p:cNvSpPr>
+          <p:nvPr>
+            <p:ph type="sldImg"/>
+          </p:nvPr>
+        </p:nvSpPr>
+        <p:spPr/>
+      </p:sp>
+      <p:sp>
+        <p:nvSpPr>
+          <p:cNvPr id="3" name="Notes Placeholder 2"/>
+          <p:cNvSpPr>
+            <a:spLocks noGrp="1"/>
+          </p:cNvSpPr>
+          <p:nvPr>
+            <p:ph type="body" idx="1"/>
+          </p:nvPr>
+        </p:nvSpPr>
+        <p:spPr/>
+        <p:txBody>
+          <a:bodyPr/>
+          <a:lstStyle/>
+          <a:p>
+            <a:r>
+              <a:rPr lang="en-US" dirty="0"/>
+              <a:t>Close by turning the project into the job: assess maturity, prove value on one workflow with a golden dataset, productionize with the right deployment shape and HA, then keep improving with online evals. That's the Professional Services motion. Then open for questions.</a:t>
+            </a:r>
+            <a:endParaRPr lang="en-US" dirty="0"/>
+          </a:p>
+        </p:txBody>
+      </p:sp>
+      <p:sp>
+        <p:nvSpPr>
+          <p:cNvPr id="4" name="Slide Number Placeholder 3"/>
+          <p:cNvSpPr>
+            <a:spLocks noGrp="1"/>
+          </p:cNvSpPr>
+          <p:nvPr>
+            <p:ph type="sldNum" sz="quarter" idx="10"/>
+          </p:nvPr>
+        </p:nvSpPr>
+        <p:spPr/>
+        <p:txBody>
+          <a:bodyPr/>
+          <a:lstStyle/>
+          <a:p>
+            <a:fld id="{F7021451-1387-4CA6-816F-3879F97B5CBC}" type="slidenum">
+              <a:rPr lang="en-US"/>
+              <a:t>16</a:t>
             </a:fld>
             <a:endParaRPr lang="en-US"/>
           </a:p>
@@ -7988,7 +8078,7 @@
                   <a:schemeClr val="accent3"/>
                 </a:solidFill>
               </a:rPr>
-              <a:t>LESSONS</a:t>
+              <a:t>ARCHITECTURE REFERENCE · SELF-HOSTED LANGSMITH</a:t>
             </a:r>
             <a:endParaRPr lang="en-US" sz="1200" dirty="0"/>
           </a:p>
@@ -8026,7 +8116,7 @@
                   <a:schemeClr val="tx1"/>
                 </a:solidFill>
               </a:rPr>
-              <a:t>What broke along the way, and the fix</a:t>
+              <a:t>LangSmith platform: components, services, scale</a:t>
             </a:r>
             <a:endParaRPr lang="en-US" sz="3200" dirty="0"/>
           </a:p>
@@ -8034,18 +8124,54 @@
       </p:sp>
       <p:sp>
         <p:nvSpPr>
-          <p:cNvPr id="4" name="card-292"/>
-          <p:cNvSpPr/>
-          <p:nvPr/>
-        </p:nvSpPr>
-        <p:spPr>
-          <a:xfrm>
-            <a:off x="548640" y="1600200"/>
-            <a:ext cx="5440680" cy="1920240"/>
+          <p:cNvPr id="4" name="text-292"/>
+          <p:cNvSpPr txBox="1"/>
+          <p:nvPr/>
+        </p:nvSpPr>
+        <p:spPr>
+          <a:xfrm>
+            <a:off x="548640" y="1481328"/>
+            <a:ext cx="1371600" cy="228600"/>
+          </a:xfrm>
+          <a:prstGeom prst="rect">
+            <a:avLst/>
+          </a:prstGeom>
+          <a:noFill/>
+          <a:ln/>
+        </p:spPr>
+        <p:txBody>
+          <a:bodyPr wrap="square" lIns="0" tIns="0" rIns="0" bIns="0" rtlCol="0" anchor="t"/>
+          <a:lstStyle/>
+          <a:p>
+            <a:pPr indent="0" marL="0">
+              <a:buNone/>
+            </a:pPr>
+            <a:r>
+              <a:rPr lang="en-US" sz="1000" b="1" spc="100" kern="0" dirty="0">
+                <a:solidFill>
+                  <a:schemeClr val="accent3"/>
+                </a:solidFill>
+              </a:rPr>
+              <a:t>CLIENTS</a:t>
+            </a:r>
+            <a:endParaRPr lang="en-US" sz="1000" dirty="0"/>
+          </a:p>
+        </p:txBody>
+      </p:sp>
+      <p:sp>
+        <p:nvSpPr>
+          <p:cNvPr id="5" name="card-293"/>
+          <p:cNvSpPr/>
+          <p:nvPr/>
+        </p:nvSpPr>
+        <p:spPr>
+          <a:xfrm>
+            <a:off x="548640" y="1783080"/>
+            <a:ext cx="1325880" cy="640080"/>
           </a:xfrm>
           <a:prstGeom prst="roundRect">
             <a:avLst>
-              <a:gd name="adj" fmla="val 5714"/>
+              <a:gd name="adj" fmla="val 17143"/>
             </a:avLst>
           </a:prstGeom>
           <a:solidFill>
@@ -8061,63 +8187,14 @@
       </p:sp>
       <p:sp>
         <p:nvSpPr>
-          <p:cNvPr id="5" name="icon-bg-293"/>
-          <p:cNvSpPr/>
-          <p:nvPr/>
-        </p:nvSpPr>
-        <p:spPr>
-          <a:xfrm>
-            <a:off x="777240" y="1828800"/>
-            <a:ext cx="457200" cy="457200"/>
-          </a:xfrm>
-          <a:prstGeom prst="ellipse">
-            <a:avLst/>
-          </a:prstGeom>
-          <a:solidFill>
-            <a:schemeClr val="accent2"/>
-          </a:solidFill>
-          <a:ln w="12700">
-            <a:solidFill>
-              <a:schemeClr val="accent2"/>
-            </a:solidFill>
-            <a:prstDash val="solid"/>
-          </a:ln>
-        </p:spPr>
-      </p:sp>
-      <p:pic>
-        <p:nvPicPr>
-          <p:cNvPr id="6" name="icon-294" descr="preencoded.png">    </p:cNvPr>
-          <p:cNvPicPr>
-            <a:picLocks noChangeAspect="1"/>
-          </p:cNvPicPr>
-          <p:nvPr/>
-        </p:nvPicPr>
-        <p:blipFill>
-          <a:blip r:embed="rId1"/>
-          <a:stretch>
-            <a:fillRect/>
-          </a:stretch>
-        </p:blipFill>
-        <p:spPr>
-          <a:xfrm>
-            <a:off x="886968" y="1938528"/>
-            <a:ext cx="237744" cy="237744"/>
-          </a:xfrm>
-          <a:prstGeom prst="rect">
-            <a:avLst/>
-          </a:prstGeom>
-        </p:spPr>
-      </p:pic>
-      <p:sp>
-        <p:nvSpPr>
-          <p:cNvPr id="7" name="text-295"/>
+          <p:cNvPr id="6" name="box-label-294"/>
           <p:cNvSpPr txBox="1"/>
           <p:nvPr/>
         </p:nvSpPr>
         <p:spPr>
           <a:xfrm>
-            <a:off x="1371600" y="1856232"/>
-            <a:ext cx="4434840" cy="411480"/>
+            <a:off x="640080" y="1783080"/>
+            <a:ext cx="1143000" cy="640080"/>
           </a:xfrm>
           <a:prstGeom prst="rect">
             <a:avLst/>
@@ -8129,105 +8206,49 @@
           <a:bodyPr wrap="square" lIns="0" tIns="0" rIns="0" bIns="0" rtlCol="0" anchor="ctr"/>
           <a:lstStyle/>
           <a:p>
-            <a:pPr indent="0" marL="0">
-              <a:buNone/>
-            </a:pPr>
-            <a:r>
-              <a:rPr lang="en-US" sz="1600" b="1" dirty="0">
+            <a:pPr algn="ctr" indent="0" marL="0">
+              <a:buNone/>
+            </a:pPr>
+            <a:r>
+              <a:rPr lang="en-US" sz="1200" b="1" dirty="0">
                 <a:solidFill>
                   <a:schemeClr val="tx1"/>
                 </a:solidFill>
               </a:rPr>
-              <a:t>Server rejected my graph</a:t>
-            </a:r>
-            <a:endParaRPr lang="en-US" sz="1600" dirty="0"/>
-          </a:p>
-        </p:txBody>
-      </p:sp>
-      <p:sp>
-        <p:nvSpPr>
-          <p:cNvPr id="8" name="text-296"/>
-          <p:cNvSpPr txBox="1"/>
-          <p:nvPr/>
-        </p:nvSpPr>
-        <p:spPr>
-          <a:xfrm>
-            <a:off x="777240" y="2423160"/>
-            <a:ext cx="4983480" cy="1005840"/>
-          </a:xfrm>
-          <a:prstGeom prst="rect">
-            <a:avLst/>
-          </a:prstGeom>
-          <a:noFill/>
-          <a:ln/>
-        </p:spPr>
-        <p:txBody>
-          <a:bodyPr wrap="square" lIns="0" tIns="0" rIns="0" bIns="0" rtlCol="0" anchor="t"/>
-          <a:lstStyle/>
-          <a:p>
-            <a:pPr indent="0" marL="0">
-              <a:spcAft>
-                <a:spcPts val="600"/>
-              </a:spcAft>
-              <a:buNone/>
-            </a:pPr>
-            <a:r>
-              <a:rPr lang="en-US" sz="1500" dirty="0">
+              <a:t>SDK tracing</a:t>
+            </a:r>
+            <a:endParaRPr lang="en-US" sz="1200" dirty="0"/>
+          </a:p>
+          <a:p>
+            <a:pPr algn="ctr" indent="0" marL="0">
+              <a:buNone/>
+            </a:pPr>
+            <a:r>
+              <a:rPr lang="en-US" sz="1100" dirty="0">
                 <a:solidFill>
                   <a:schemeClr val="accent5"/>
                 </a:solidFill>
               </a:rPr>
-              <a:t>Agent Server refuses graphs compiled with their own checkpointer.</a:t>
-            </a:r>
-            <a:endParaRPr lang="en-US" sz="1500" dirty="0"/>
-          </a:p>
-          <a:p>
-            <a:pPr indent="0" marL="0">
-              <a:spcAft>
-                <a:spcPts val="600"/>
-              </a:spcAft>
-              <a:buNone/>
-            </a:pPr>
-            <a:r>
-              <a:rPr lang="en-US" sz="1500" b="1" dirty="0">
-                <a:solidFill>
-                  <a:schemeClr val="accent3"/>
-                </a:solidFill>
-              </a:rPr>
-              <a:t>Fix: </a:t>
-            </a:r>
-            <a:pPr indent="0" marL="0">
-              <a:spcAft>
-                <a:spcPts val="600"/>
-              </a:spcAft>
-              <a:buNone/>
-            </a:pPr>
-            <a:r>
-              <a:rPr lang="en-US" sz="1500" dirty="0">
-                <a:solidFill>
-                  <a:schemeClr val="tx1"/>
-                </a:solidFill>
-              </a:rPr>
-              <a:t>Export via build_*(checkpointer=None); add InMemorySaver only for local runs.</a:t>
-            </a:r>
-            <a:endParaRPr lang="en-US" sz="1500" dirty="0"/>
-          </a:p>
-        </p:txBody>
-      </p:sp>
-      <p:sp>
-        <p:nvSpPr>
-          <p:cNvPr id="9" name="card-297"/>
-          <p:cNvSpPr/>
-          <p:nvPr/>
-        </p:nvSpPr>
-        <p:spPr>
-          <a:xfrm>
-            <a:off x="6199632" y="1600200"/>
-            <a:ext cx="5440680" cy="1920240"/>
+              <a:t>apps, CI evals</a:t>
+            </a:r>
+            <a:endParaRPr lang="en-US" sz="1200" dirty="0"/>
+          </a:p>
+        </p:txBody>
+      </p:sp>
+      <p:sp>
+        <p:nvSpPr>
+          <p:cNvPr id="7" name="card-295"/>
+          <p:cNvSpPr/>
+          <p:nvPr/>
+        </p:nvSpPr>
+        <p:spPr>
+          <a:xfrm>
+            <a:off x="548640" y="2606040"/>
+            <a:ext cx="1325880" cy="640080"/>
           </a:xfrm>
           <a:prstGeom prst="roundRect">
             <a:avLst>
-              <a:gd name="adj" fmla="val 5714"/>
+              <a:gd name="adj" fmla="val 17143"/>
             </a:avLst>
           </a:prstGeom>
           <a:solidFill>
@@ -8243,63 +8264,14 @@
       </p:sp>
       <p:sp>
         <p:nvSpPr>
-          <p:cNvPr id="10" name="icon-bg-298"/>
-          <p:cNvSpPr/>
-          <p:nvPr/>
-        </p:nvSpPr>
-        <p:spPr>
-          <a:xfrm>
-            <a:off x="6428232" y="1828800"/>
-            <a:ext cx="457200" cy="457200"/>
-          </a:xfrm>
-          <a:prstGeom prst="ellipse">
-            <a:avLst/>
-          </a:prstGeom>
-          <a:solidFill>
-            <a:schemeClr val="accent2"/>
-          </a:solidFill>
-          <a:ln w="12700">
-            <a:solidFill>
-              <a:schemeClr val="accent2"/>
-            </a:solidFill>
-            <a:prstDash val="solid"/>
-          </a:ln>
-        </p:spPr>
-      </p:sp>
-      <p:pic>
-        <p:nvPicPr>
-          <p:cNvPr id="11" name="icon-299" descr="preencoded.png">    </p:cNvPr>
-          <p:cNvPicPr>
-            <a:picLocks noChangeAspect="1"/>
-          </p:cNvPicPr>
-          <p:nvPr/>
-        </p:nvPicPr>
-        <p:blipFill>
-          <a:blip r:embed="rId2"/>
-          <a:stretch>
-            <a:fillRect/>
-          </a:stretch>
-        </p:blipFill>
-        <p:spPr>
-          <a:xfrm>
-            <a:off x="6537960" y="1938528"/>
-            <a:ext cx="237744" cy="237744"/>
-          </a:xfrm>
-          <a:prstGeom prst="rect">
-            <a:avLst/>
-          </a:prstGeom>
-        </p:spPr>
-      </p:pic>
-      <p:sp>
-        <p:nvSpPr>
-          <p:cNvPr id="12" name="text-300"/>
+          <p:cNvPr id="8" name="box-label-296"/>
           <p:cNvSpPr txBox="1"/>
           <p:nvPr/>
         </p:nvSpPr>
         <p:spPr>
           <a:xfrm>
-            <a:off x="7022592" y="1856232"/>
-            <a:ext cx="4434840" cy="411480"/>
+            <a:off x="640080" y="2606040"/>
+            <a:ext cx="1143000" cy="640080"/>
           </a:xfrm>
           <a:prstGeom prst="rect">
             <a:avLst/>
@@ -8311,105 +8283,49 @@
           <a:bodyPr wrap="square" lIns="0" tIns="0" rIns="0" bIns="0" rtlCol="0" anchor="ctr"/>
           <a:lstStyle/>
           <a:p>
-            <a:pPr indent="0" marL="0">
-              <a:buNone/>
-            </a:pPr>
-            <a:r>
-              <a:rPr lang="en-US" sz="1600" b="1" dirty="0">
+            <a:pPr algn="ctr" indent="0" marL="0">
+              <a:buNone/>
+            </a:pPr>
+            <a:r>
+              <a:rPr lang="en-US" sz="1200" b="1" dirty="0">
                 <a:solidFill>
                   <a:schemeClr val="tx1"/>
                 </a:solidFill>
               </a:rPr>
-              <a:t>Subagent results vanished</a:t>
-            </a:r>
-            <a:endParaRPr lang="en-US" sz="1600" dirty="0"/>
-          </a:p>
-        </p:txBody>
-      </p:sp>
-      <p:sp>
-        <p:nvSpPr>
-          <p:cNvPr id="13" name="text-301"/>
-          <p:cNvSpPr txBox="1"/>
-          <p:nvPr/>
-        </p:nvSpPr>
-        <p:spPr>
-          <a:xfrm>
-            <a:off x="6428232" y="2423160"/>
-            <a:ext cx="4983480" cy="1005840"/>
-          </a:xfrm>
-          <a:prstGeom prst="rect">
-            <a:avLst/>
-          </a:prstGeom>
-          <a:noFill/>
-          <a:ln/>
-        </p:spPr>
-        <p:txBody>
-          <a:bodyPr wrap="square" lIns="0" tIns="0" rIns="0" bIns="0" rtlCol="0" anchor="t"/>
-          <a:lstStyle/>
-          <a:p>
-            <a:pPr indent="0" marL="0">
-              <a:spcAft>
-                <a:spcPts val="600"/>
-              </a:spcAft>
-              <a:buNone/>
-            </a:pPr>
-            <a:r>
-              <a:rPr lang="en-US" sz="1500" dirty="0">
+              <a:t>UI users</a:t>
+            </a:r>
+            <a:endParaRPr lang="en-US" sz="1200" dirty="0"/>
+          </a:p>
+          <a:p>
+            <a:pPr algn="ctr" indent="0" marL="0">
+              <a:buNone/>
+            </a:pPr>
+            <a:r>
+              <a:rPr lang="en-US" sz="1100" dirty="0">
                 <a:solidFill>
                   <a:schemeClr val="accent5"/>
                 </a:solidFill>
               </a:rPr>
-              <a:t>Supervisors only see a subagent's final message, not its tool calls.</a:t>
-            </a:r>
-            <a:endParaRPr lang="en-US" sz="1500" dirty="0"/>
-          </a:p>
-          <a:p>
-            <a:pPr indent="0" marL="0">
-              <a:spcAft>
-                <a:spcPts val="600"/>
-              </a:spcAft>
-              <a:buNone/>
-            </a:pPr>
-            <a:r>
-              <a:rPr lang="en-US" sz="1500" b="1" dirty="0">
-                <a:solidFill>
-                  <a:schemeClr val="accent3"/>
-                </a:solidFill>
-              </a:rPr>
-              <a:t>Fix: </a:t>
-            </a:r>
-            <a:pPr indent="0" marL="0">
-              <a:spcAft>
-                <a:spcPts val="600"/>
-              </a:spcAft>
-              <a:buNone/>
-            </a:pPr>
-            <a:r>
-              <a:rPr lang="en-US" sz="1500" dirty="0">
-                <a:solidFill>
-                  <a:schemeClr val="tx1"/>
-                </a:solidFill>
-              </a:rPr>
-              <a:t>A FINAL_ANSWER_RULE in every specialist prompt, guarded by an eval.</a:t>
-            </a:r>
-            <a:endParaRPr lang="en-US" sz="1500" dirty="0"/>
-          </a:p>
-        </p:txBody>
-      </p:sp>
-      <p:sp>
-        <p:nvSpPr>
-          <p:cNvPr id="14" name="card-302"/>
-          <p:cNvSpPr/>
-          <p:nvPr/>
-        </p:nvSpPr>
-        <p:spPr>
-          <a:xfrm>
-            <a:off x="548640" y="3794760"/>
-            <a:ext cx="5440680" cy="1920240"/>
+              <a:t>browser</a:t>
+            </a:r>
+            <a:endParaRPr lang="en-US" sz="1200" dirty="0"/>
+          </a:p>
+        </p:txBody>
+      </p:sp>
+      <p:sp>
+        <p:nvSpPr>
+          <p:cNvPr id="9" name="card-297"/>
+          <p:cNvSpPr/>
+          <p:nvPr/>
+        </p:nvSpPr>
+        <p:spPr>
+          <a:xfrm>
+            <a:off x="548640" y="3429000"/>
+            <a:ext cx="1325880" cy="640080"/>
           </a:xfrm>
           <a:prstGeom prst="roundRect">
             <a:avLst>
-              <a:gd name="adj" fmla="val 5714"/>
+              <a:gd name="adj" fmla="val 17143"/>
             </a:avLst>
           </a:prstGeom>
           <a:solidFill>
@@ -8425,63 +8341,91 @@
       </p:sp>
       <p:sp>
         <p:nvSpPr>
-          <p:cNvPr id="15" name="icon-bg-303"/>
-          <p:cNvSpPr/>
-          <p:nvPr/>
-        </p:nvSpPr>
-        <p:spPr>
-          <a:xfrm>
-            <a:off x="777240" y="4023360"/>
-            <a:ext cx="457200" cy="457200"/>
-          </a:xfrm>
-          <a:prstGeom prst="ellipse">
-            <a:avLst/>
+          <p:cNvPr id="10" name="box-label-298"/>
+          <p:cNvSpPr txBox="1"/>
+          <p:nvPr/>
+        </p:nvSpPr>
+        <p:spPr>
+          <a:xfrm>
+            <a:off x="640080" y="3429000"/>
+            <a:ext cx="1143000" cy="640080"/>
+          </a:xfrm>
+          <a:prstGeom prst="rect">
+            <a:avLst/>
+          </a:prstGeom>
+          <a:noFill/>
+          <a:ln/>
+        </p:spPr>
+        <p:txBody>
+          <a:bodyPr wrap="square" lIns="0" tIns="0" rIns="0" bIns="0" rtlCol="0" anchor="ctr"/>
+          <a:lstStyle/>
+          <a:p>
+            <a:pPr algn="ctr" indent="0" marL="0">
+              <a:buNone/>
+            </a:pPr>
+            <a:r>
+              <a:rPr lang="en-US" sz="1200" b="1" dirty="0">
+                <a:solidFill>
+                  <a:schemeClr val="tx1"/>
+                </a:solidFill>
+              </a:rPr>
+              <a:t>Agent clients</a:t>
+            </a:r>
+            <a:endParaRPr lang="en-US" sz="1200" dirty="0"/>
+          </a:p>
+          <a:p>
+            <a:pPr algn="ctr" indent="0" marL="0">
+              <a:buNone/>
+            </a:pPr>
+            <a:r>
+              <a:rPr lang="en-US" sz="1100" dirty="0">
+                <a:solidFill>
+                  <a:schemeClr val="accent5"/>
+                </a:solidFill>
+              </a:rPr>
+              <a:t>SDK / webhooks</a:t>
+            </a:r>
+            <a:endParaRPr lang="en-US" sz="1200" dirty="0"/>
+          </a:p>
+        </p:txBody>
+      </p:sp>
+      <p:sp>
+        <p:nvSpPr>
+          <p:cNvPr id="11" name="card-299"/>
+          <p:cNvSpPr/>
+          <p:nvPr/>
+        </p:nvSpPr>
+        <p:spPr>
+          <a:xfrm>
+            <a:off x="2103120" y="2240280"/>
+            <a:ext cx="1188720" cy="1371600"/>
+          </a:xfrm>
+          <a:prstGeom prst="roundRect">
+            <a:avLst>
+              <a:gd name="adj" fmla="val 9231"/>
+            </a:avLst>
           </a:prstGeom>
           <a:solidFill>
-            <a:schemeClr val="accent2"/>
+            <a:schemeClr val="tx2"/>
           </a:solidFill>
           <a:ln w="12700">
             <a:solidFill>
-              <a:schemeClr val="accent2"/>
+              <a:schemeClr val="tx2"/>
             </a:solidFill>
             <a:prstDash val="solid"/>
           </a:ln>
         </p:spPr>
       </p:sp>
-      <p:pic>
-        <p:nvPicPr>
-          <p:cNvPr id="16" name="icon-304" descr="preencoded.png">    </p:cNvPr>
-          <p:cNvPicPr>
-            <a:picLocks noChangeAspect="1"/>
-          </p:cNvPicPr>
-          <p:nvPr/>
-        </p:nvPicPr>
-        <p:blipFill>
-          <a:blip r:embed="rId3"/>
-          <a:stretch>
-            <a:fillRect/>
-          </a:stretch>
-        </p:blipFill>
-        <p:spPr>
-          <a:xfrm>
-            <a:off x="886968" y="4133088"/>
-            <a:ext cx="237744" cy="237744"/>
-          </a:xfrm>
-          <a:prstGeom prst="rect">
-            <a:avLst/>
-          </a:prstGeom>
-        </p:spPr>
-      </p:pic>
-      <p:sp>
-        <p:nvSpPr>
-          <p:cNvPr id="17" name="text-305"/>
+      <p:sp>
+        <p:nvSpPr>
+          <p:cNvPr id="12" name="box-label-300"/>
           <p:cNvSpPr txBox="1"/>
           <p:nvPr/>
         </p:nvSpPr>
         <p:spPr>
           <a:xfrm>
-            <a:off x="1371600" y="4050792"/>
-            <a:ext cx="4434840" cy="411480"/>
+            <a:off x="2194560" y="2240280"/>
+            <a:ext cx="1005840" cy="1371600"/>
           </a:xfrm>
           <a:prstGeom prst="rect">
             <a:avLst/>
@@ -8493,105 +8437,121 @@
           <a:bodyPr wrap="square" lIns="0" tIns="0" rIns="0" bIns="0" rtlCol="0" anchor="ctr"/>
           <a:lstStyle/>
           <a:p>
-            <a:pPr indent="0" marL="0">
-              <a:buNone/>
-            </a:pPr>
-            <a:r>
-              <a:rPr lang="en-US" sz="1600" b="1" dirty="0">
-                <a:solidFill>
-                  <a:schemeClr val="tx1"/>
-                </a:solidFill>
-              </a:rPr>
-              <a:t>Air-gap broke at first call</a:t>
-            </a:r>
-            <a:endParaRPr lang="en-US" sz="1600" dirty="0"/>
-          </a:p>
-        </p:txBody>
-      </p:sp>
-      <p:sp>
-        <p:nvSpPr>
-          <p:cNvPr id="18" name="text-306"/>
-          <p:cNvSpPr txBox="1"/>
-          <p:nvPr/>
-        </p:nvSpPr>
-        <p:spPr>
-          <a:xfrm>
-            <a:off x="777240" y="4617720"/>
-            <a:ext cx="4983480" cy="1005840"/>
-          </a:xfrm>
-          <a:prstGeom prst="rect">
-            <a:avLst/>
-          </a:prstGeom>
-          <a:noFill/>
-          <a:ln/>
-        </p:spPr>
-        <p:txBody>
-          <a:bodyPr wrap="square" lIns="0" tIns="0" rIns="0" bIns="0" rtlCol="0" anchor="t"/>
-          <a:lstStyle/>
-          <a:p>
-            <a:pPr indent="0" marL="0">
-              <a:spcAft>
-                <a:spcPts val="600"/>
-              </a:spcAft>
-              <a:buNone/>
-            </a:pPr>
-            <a:r>
-              <a:rPr lang="en-US" sz="1500" dirty="0">
-                <a:solidFill>
-                  <a:schemeClr val="accent5"/>
-                </a:solidFill>
-              </a:rPr>
-              <a:t>The local embedding model downloads on first use inside the container.</a:t>
-            </a:r>
-            <a:endParaRPr lang="en-US" sz="1500" dirty="0"/>
-          </a:p>
-          <a:p>
-            <a:pPr indent="0" marL="0">
-              <a:spcAft>
-                <a:spcPts val="600"/>
-              </a:spcAft>
-              <a:buNone/>
-            </a:pPr>
-            <a:r>
-              <a:rPr lang="en-US" sz="1500" b="1" dirty="0">
-                <a:solidFill>
-                  <a:schemeClr val="accent3"/>
-                </a:solidFill>
-              </a:rPr>
-              <a:t>Fix: </a:t>
-            </a:r>
-            <a:pPr indent="0" marL="0">
-              <a:spcAft>
-                <a:spcPts val="600"/>
-              </a:spcAft>
-              <a:buNone/>
-            </a:pPr>
-            <a:r>
-              <a:rPr lang="en-US" sz="1500" dirty="0">
-                <a:solidFill>
-                  <a:schemeClr val="tx1"/>
-                </a:solidFill>
-              </a:rPr>
-              <a:t>Pre-fetch it at image build with dockerfile_lines.</a:t>
-            </a:r>
-            <a:endParaRPr lang="en-US" sz="1500" dirty="0"/>
-          </a:p>
-        </p:txBody>
-      </p:sp>
-      <p:sp>
-        <p:nvSpPr>
-          <p:cNvPr id="19" name="card-307"/>
-          <p:cNvSpPr/>
-          <p:nvPr/>
-        </p:nvSpPr>
-        <p:spPr>
-          <a:xfrm>
-            <a:off x="6199632" y="3794760"/>
-            <a:ext cx="5440680" cy="1920240"/>
+            <a:pPr algn="ctr" indent="0" marL="0">
+              <a:buNone/>
+            </a:pPr>
+            <a:r>
+              <a:rPr lang="en-US" sz="1200" b="1" dirty="0">
+                <a:solidFill>
+                  <a:schemeClr val="bg1"/>
+                </a:solidFill>
+              </a:rPr>
+              <a:t>Ingress / LB</a:t>
+            </a:r>
+            <a:endParaRPr lang="en-US" sz="1200" dirty="0"/>
+          </a:p>
+          <a:p>
+            <a:pPr algn="ctr" indent="0" marL="0">
+              <a:buNone/>
+            </a:pPr>
+            <a:r>
+              <a:rPr lang="en-US" sz="1100" dirty="0">
+                <a:solidFill>
+                  <a:schemeClr val="accent4"/>
+                </a:solidFill>
+              </a:rPr>
+              <a:t>TLS · SSO (OIDC)</a:t>
+            </a:r>
+            <a:endParaRPr lang="en-US" sz="1200" dirty="0"/>
+          </a:p>
+        </p:txBody>
+      </p:sp>
+      <p:sp>
+        <p:nvSpPr>
+          <p:cNvPr id="13" name="arrow-301"/>
+          <p:cNvSpPr/>
+          <p:nvPr/>
+        </p:nvSpPr>
+        <p:spPr>
+          <a:xfrm>
+            <a:off x="1874520" y="2103120"/>
+            <a:ext cx="228600" cy="548640"/>
+          </a:xfrm>
+          <a:prstGeom prst="line">
+            <a:avLst/>
+          </a:prstGeom>
+          <a:noFill/>
+          <a:ln w="19050">
+            <a:solidFill>
+              <a:srgbClr val="5B6B66"/>
+            </a:solidFill>
+            <a:prstDash val="solid"/>
+            <a:tailEnd type="triangle"/>
+          </a:ln>
+        </p:spPr>
+      </p:sp>
+      <p:sp>
+        <p:nvSpPr>
+          <p:cNvPr id="14" name="arrow-302"/>
+          <p:cNvSpPr/>
+          <p:nvPr/>
+        </p:nvSpPr>
+        <p:spPr>
+          <a:xfrm>
+            <a:off x="1874520" y="2926080"/>
+            <a:ext cx="228600" cy="914"/>
+          </a:xfrm>
+          <a:prstGeom prst="line">
+            <a:avLst/>
+          </a:prstGeom>
+          <a:noFill/>
+          <a:ln w="19050">
+            <a:solidFill>
+              <a:srgbClr val="5B6B66"/>
+            </a:solidFill>
+            <a:prstDash val="solid"/>
+            <a:tailEnd type="triangle"/>
+          </a:ln>
+        </p:spPr>
+      </p:sp>
+      <p:sp>
+        <p:nvSpPr>
+          <p:cNvPr id="15" name="arrow-303"/>
+          <p:cNvSpPr/>
+          <p:nvPr/>
+        </p:nvSpPr>
+        <p:spPr>
+          <a:xfrm flipV="1">
+            <a:off x="1874520" y="3200400"/>
+            <a:ext cx="228600" cy="548640"/>
+          </a:xfrm>
+          <a:prstGeom prst="line">
+            <a:avLst/>
+          </a:prstGeom>
+          <a:noFill/>
+          <a:ln w="19050">
+            <a:solidFill>
+              <a:srgbClr val="5B6B66"/>
+            </a:solidFill>
+            <a:prstDash val="solid"/>
+            <a:tailEnd type="triangle"/>
+          </a:ln>
+        </p:spPr>
+      </p:sp>
+      <p:sp>
+        <p:nvSpPr>
+          <p:cNvPr id="16" name="card-304"/>
+          <p:cNvSpPr/>
+          <p:nvPr/>
+        </p:nvSpPr>
+        <p:spPr>
+          <a:xfrm>
+            <a:off x="3520440" y="1481328"/>
+            <a:ext cx="5486400" cy="3584448"/>
           </a:xfrm>
           <a:prstGeom prst="roundRect">
             <a:avLst>
-              <a:gd name="adj" fmla="val 5714"/>
+              <a:gd name="adj" fmla="val 3061"/>
             </a:avLst>
           </a:prstGeom>
           <a:solidFill>
@@ -8607,63 +8567,113 @@
       </p:sp>
       <p:sp>
         <p:nvSpPr>
-          <p:cNvPr id="20" name="icon-bg-308"/>
-          <p:cNvSpPr/>
-          <p:nvPr/>
-        </p:nvSpPr>
-        <p:spPr>
-          <a:xfrm>
-            <a:off x="6428232" y="4023360"/>
-            <a:ext cx="457200" cy="457200"/>
-          </a:xfrm>
-          <a:prstGeom prst="ellipse">
-            <a:avLst/>
+          <p:cNvPr id="17" name="text-305"/>
+          <p:cNvSpPr txBox="1"/>
+          <p:nvPr/>
+        </p:nvSpPr>
+        <p:spPr>
+          <a:xfrm>
+            <a:off x="3703320" y="1591056"/>
+            <a:ext cx="4572000" cy="228600"/>
+          </a:xfrm>
+          <a:prstGeom prst="rect">
+            <a:avLst/>
+          </a:prstGeom>
+          <a:noFill/>
+          <a:ln/>
+        </p:spPr>
+        <p:txBody>
+          <a:bodyPr wrap="square" lIns="0" tIns="0" rIns="0" bIns="0" rtlCol="0" anchor="t"/>
+          <a:lstStyle/>
+          <a:p>
+            <a:pPr indent="0" marL="0">
+              <a:buNone/>
+            </a:pPr>
+            <a:r>
+              <a:rPr lang="en-US" sz="1000" b="1" spc="100" kern="0" dirty="0">
+                <a:solidFill>
+                  <a:schemeClr val="accent3"/>
+                </a:solidFill>
+              </a:rPr>
+              <a:t>KUBERNETES · LANGSMITH NAMESPACE</a:t>
+            </a:r>
+            <a:endParaRPr lang="en-US" sz="1000" dirty="0"/>
+          </a:p>
+        </p:txBody>
+      </p:sp>
+      <p:sp>
+        <p:nvSpPr>
+          <p:cNvPr id="18" name="text-306"/>
+          <p:cNvSpPr txBox="1"/>
+          <p:nvPr/>
+        </p:nvSpPr>
+        <p:spPr>
+          <a:xfrm>
+            <a:off x="3703320" y="1828800"/>
+            <a:ext cx="2743200" cy="228600"/>
+          </a:xfrm>
+          <a:prstGeom prst="rect">
+            <a:avLst/>
+          </a:prstGeom>
+          <a:noFill/>
+          <a:ln/>
+        </p:spPr>
+        <p:txBody>
+          <a:bodyPr wrap="square" lIns="0" tIns="0" rIns="0" bIns="0" rtlCol="0" anchor="t"/>
+          <a:lstStyle/>
+          <a:p>
+            <a:pPr indent="0" marL="0">
+              <a:buNone/>
+            </a:pPr>
+            <a:r>
+              <a:rPr lang="en-US" sz="1100" i="1" dirty="0">
+                <a:solidFill>
+                  <a:schemeClr val="accent5"/>
+                </a:solidFill>
+              </a:rPr>
+              <a:t>Read / UI path</a:t>
+            </a:r>
+            <a:endParaRPr lang="en-US" sz="1100" dirty="0"/>
+          </a:p>
+        </p:txBody>
+      </p:sp>
+      <p:sp>
+        <p:nvSpPr>
+          <p:cNvPr id="19" name="card-307"/>
+          <p:cNvSpPr/>
+          <p:nvPr/>
+        </p:nvSpPr>
+        <p:spPr>
+          <a:xfrm>
+            <a:off x="3703320" y="2075688"/>
+            <a:ext cx="1234440" cy="713232"/>
+          </a:xfrm>
+          <a:prstGeom prst="roundRect">
+            <a:avLst>
+              <a:gd name="adj" fmla="val 15385"/>
+            </a:avLst>
           </a:prstGeom>
           <a:solidFill>
-            <a:schemeClr val="accent2"/>
+            <a:schemeClr val="bg1"/>
           </a:solidFill>
           <a:ln w="12700">
             <a:solidFill>
-              <a:schemeClr val="accent2"/>
+              <a:schemeClr val="bg1"/>
             </a:solidFill>
             <a:prstDash val="solid"/>
           </a:ln>
         </p:spPr>
       </p:sp>
-      <p:pic>
-        <p:nvPicPr>
-          <p:cNvPr id="21" name="icon-309" descr="preencoded.png">    </p:cNvPr>
-          <p:cNvPicPr>
-            <a:picLocks noChangeAspect="1"/>
-          </p:cNvPicPr>
-          <p:nvPr/>
-        </p:nvPicPr>
-        <p:blipFill>
-          <a:blip r:embed="rId4"/>
-          <a:stretch>
-            <a:fillRect/>
-          </a:stretch>
-        </p:blipFill>
-        <p:spPr>
-          <a:xfrm>
-            <a:off x="6537960" y="4133088"/>
-            <a:ext cx="237744" cy="237744"/>
-          </a:xfrm>
-          <a:prstGeom prst="rect">
-            <a:avLst/>
-          </a:prstGeom>
-        </p:spPr>
-      </p:pic>
-      <p:sp>
-        <p:nvSpPr>
-          <p:cNvPr id="22" name="text-310"/>
+      <p:sp>
+        <p:nvSpPr>
+          <p:cNvPr id="20" name="box-label-308"/>
           <p:cNvSpPr txBox="1"/>
           <p:nvPr/>
         </p:nvSpPr>
         <p:spPr>
           <a:xfrm>
-            <a:off x="7022592" y="4050792"/>
-            <a:ext cx="4434840" cy="411480"/>
+            <a:off x="3794760" y="2075688"/>
+            <a:ext cx="1051560" cy="713232"/>
           </a:xfrm>
           <a:prstGeom prst="rect">
             <a:avLst/>
@@ -8675,31 +8685,300 @@
           <a:bodyPr wrap="square" lIns="0" tIns="0" rIns="0" bIns="0" rtlCol="0" anchor="ctr"/>
           <a:lstStyle/>
           <a:p>
-            <a:pPr indent="0" marL="0">
-              <a:buNone/>
-            </a:pPr>
-            <a:r>
-              <a:rPr lang="en-US" sz="1600" b="1" dirty="0">
+            <a:pPr algn="ctr" indent="0" marL="0">
+              <a:buNone/>
+            </a:pPr>
+            <a:r>
+              <a:rPr lang="en-US" sz="1200" b="1" dirty="0">
                 <a:solidFill>
                   <a:schemeClr val="tx1"/>
                 </a:solidFill>
               </a:rPr>
-              <a:t>A dependency was sunsetting</a:t>
-            </a:r>
-            <a:endParaRPr lang="en-US" sz="1600" dirty="0"/>
-          </a:p>
-        </p:txBody>
-      </p:sp>
-      <p:sp>
-        <p:nvSpPr>
-          <p:cNvPr id="23" name="text-311"/>
+              <a:t>Frontend</a:t>
+            </a:r>
+            <a:endParaRPr lang="en-US" sz="1200" dirty="0"/>
+          </a:p>
+          <a:p>
+            <a:pPr algn="ctr" indent="0" marL="0">
+              <a:buNone/>
+            </a:pPr>
+            <a:r>
+              <a:rPr lang="en-US" sz="1100" dirty="0">
+                <a:solidFill>
+                  <a:schemeClr val="accent5"/>
+                </a:solidFill>
+              </a:rPr>
+              <a:t>UI + API routing</a:t>
+            </a:r>
+            <a:endParaRPr lang="en-US" sz="1200" dirty="0"/>
+          </a:p>
+        </p:txBody>
+      </p:sp>
+      <p:sp>
+        <p:nvSpPr>
+          <p:cNvPr id="21" name="card-309"/>
+          <p:cNvSpPr/>
+          <p:nvPr/>
+        </p:nvSpPr>
+        <p:spPr>
+          <a:xfrm>
+            <a:off x="5047488" y="2075688"/>
+            <a:ext cx="1234440" cy="713232"/>
+          </a:xfrm>
+          <a:prstGeom prst="roundRect">
+            <a:avLst>
+              <a:gd name="adj" fmla="val 15385"/>
+            </a:avLst>
+          </a:prstGeom>
+          <a:solidFill>
+            <a:schemeClr val="bg1"/>
+          </a:solidFill>
+          <a:ln w="12700">
+            <a:solidFill>
+              <a:schemeClr val="bg1"/>
+            </a:solidFill>
+            <a:prstDash val="solid"/>
+          </a:ln>
+        </p:spPr>
+      </p:sp>
+      <p:sp>
+        <p:nvSpPr>
+          <p:cNvPr id="22" name="box-label-310"/>
           <p:cNvSpPr txBox="1"/>
           <p:nvPr/>
         </p:nvSpPr>
         <p:spPr>
           <a:xfrm>
-            <a:off x="6428232" y="4617720"/>
-            <a:ext cx="4983480" cy="1005840"/>
+            <a:off x="5138928" y="2075688"/>
+            <a:ext cx="1051560" cy="713232"/>
+          </a:xfrm>
+          <a:prstGeom prst="rect">
+            <a:avLst/>
+          </a:prstGeom>
+          <a:noFill/>
+          <a:ln/>
+        </p:spPr>
+        <p:txBody>
+          <a:bodyPr wrap="square" lIns="0" tIns="0" rIns="0" bIns="0" rtlCol="0" anchor="ctr"/>
+          <a:lstStyle/>
+          <a:p>
+            <a:pPr algn="ctr" indent="0" marL="0">
+              <a:buNone/>
+            </a:pPr>
+            <a:r>
+              <a:rPr lang="en-US" sz="1200" b="1" dirty="0">
+                <a:solidFill>
+                  <a:schemeClr val="tx1"/>
+                </a:solidFill>
+              </a:rPr>
+              <a:t>Backend</a:t>
+            </a:r>
+            <a:endParaRPr lang="en-US" sz="1200" dirty="0"/>
+          </a:p>
+          <a:p>
+            <a:pPr algn="ctr" indent="0" marL="0">
+              <a:buNone/>
+            </a:pPr>
+            <a:r>
+              <a:rPr lang="en-US" sz="1100" dirty="0">
+                <a:solidFill>
+                  <a:schemeClr val="accent5"/>
+                </a:solidFill>
+              </a:rPr>
+              <a:t>CRUD, queries</a:t>
+            </a:r>
+            <a:endParaRPr lang="en-US" sz="1200" dirty="0"/>
+          </a:p>
+        </p:txBody>
+      </p:sp>
+      <p:sp>
+        <p:nvSpPr>
+          <p:cNvPr id="23" name="card-311"/>
+          <p:cNvSpPr/>
+          <p:nvPr/>
+        </p:nvSpPr>
+        <p:spPr>
+          <a:xfrm>
+            <a:off x="6391656" y="2075688"/>
+            <a:ext cx="1188720" cy="713232"/>
+          </a:xfrm>
+          <a:prstGeom prst="roundRect">
+            <a:avLst>
+              <a:gd name="adj" fmla="val 15385"/>
+            </a:avLst>
+          </a:prstGeom>
+          <a:solidFill>
+            <a:schemeClr val="bg1"/>
+          </a:solidFill>
+          <a:ln w="12700">
+            <a:solidFill>
+              <a:schemeClr val="bg1"/>
+            </a:solidFill>
+            <a:prstDash val="solid"/>
+          </a:ln>
+        </p:spPr>
+      </p:sp>
+      <p:sp>
+        <p:nvSpPr>
+          <p:cNvPr id="24" name="box-label-312"/>
+          <p:cNvSpPr txBox="1"/>
+          <p:nvPr/>
+        </p:nvSpPr>
+        <p:spPr>
+          <a:xfrm>
+            <a:off x="6483096" y="2075688"/>
+            <a:ext cx="1005840" cy="713232"/>
+          </a:xfrm>
+          <a:prstGeom prst="rect">
+            <a:avLst/>
+          </a:prstGeom>
+          <a:noFill/>
+          <a:ln/>
+        </p:spPr>
+        <p:txBody>
+          <a:bodyPr wrap="square" lIns="0" tIns="0" rIns="0" bIns="0" rtlCol="0" anchor="ctr"/>
+          <a:lstStyle/>
+          <a:p>
+            <a:pPr algn="ctr" indent="0" marL="0">
+              <a:buNone/>
+            </a:pPr>
+            <a:r>
+              <a:rPr lang="en-US" sz="1200" b="1" dirty="0">
+                <a:solidFill>
+                  <a:schemeClr val="tx1"/>
+                </a:solidFill>
+              </a:rPr>
+              <a:t>Playground</a:t>
+            </a:r>
+            <a:endParaRPr lang="en-US" sz="1200" dirty="0"/>
+          </a:p>
+          <a:p>
+            <a:pPr algn="ctr" indent="0" marL="0">
+              <a:buNone/>
+            </a:pPr>
+            <a:r>
+              <a:rPr lang="en-US" sz="1100" dirty="0">
+                <a:solidFill>
+                  <a:schemeClr val="accent5"/>
+                </a:solidFill>
+              </a:rPr>
+              <a:t>LLM API proxy</a:t>
+            </a:r>
+            <a:endParaRPr lang="en-US" sz="1200" dirty="0"/>
+          </a:p>
+        </p:txBody>
+      </p:sp>
+      <p:sp>
+        <p:nvSpPr>
+          <p:cNvPr id="25" name="card-313"/>
+          <p:cNvSpPr/>
+          <p:nvPr/>
+        </p:nvSpPr>
+        <p:spPr>
+          <a:xfrm>
+            <a:off x="7690104" y="2075688"/>
+            <a:ext cx="1188720" cy="713232"/>
+          </a:xfrm>
+          <a:prstGeom prst="roundRect">
+            <a:avLst>
+              <a:gd name="adj" fmla="val 15385"/>
+            </a:avLst>
+          </a:prstGeom>
+          <a:solidFill>
+            <a:schemeClr val="bg1"/>
+          </a:solidFill>
+          <a:ln w="12700">
+            <a:solidFill>
+              <a:schemeClr val="bg1"/>
+            </a:solidFill>
+            <a:prstDash val="solid"/>
+          </a:ln>
+        </p:spPr>
+      </p:sp>
+      <p:sp>
+        <p:nvSpPr>
+          <p:cNvPr id="26" name="box-label-314"/>
+          <p:cNvSpPr txBox="1"/>
+          <p:nvPr/>
+        </p:nvSpPr>
+        <p:spPr>
+          <a:xfrm>
+            <a:off x="7781544" y="2075688"/>
+            <a:ext cx="1005840" cy="713232"/>
+          </a:xfrm>
+          <a:prstGeom prst="rect">
+            <a:avLst/>
+          </a:prstGeom>
+          <a:noFill/>
+          <a:ln/>
+        </p:spPr>
+        <p:txBody>
+          <a:bodyPr wrap="square" lIns="0" tIns="0" rIns="0" bIns="0" rtlCol="0" anchor="ctr"/>
+          <a:lstStyle/>
+          <a:p>
+            <a:pPr algn="ctr" indent="0" marL="0">
+              <a:buNone/>
+            </a:pPr>
+            <a:r>
+              <a:rPr lang="en-US" sz="1200" b="1" dirty="0">
+                <a:solidFill>
+                  <a:schemeClr val="tx1"/>
+                </a:solidFill>
+              </a:rPr>
+              <a:t>ACE</a:t>
+            </a:r>
+            <a:endParaRPr lang="en-US" sz="1200" dirty="0"/>
+          </a:p>
+          <a:p>
+            <a:pPr algn="ctr" indent="0" marL="0">
+              <a:buNone/>
+            </a:pPr>
+            <a:r>
+              <a:rPr lang="en-US" sz="1100" dirty="0">
+                <a:solidFill>
+                  <a:schemeClr val="accent5"/>
+                </a:solidFill>
+              </a:rPr>
+              <a:t>sandboxed code</a:t>
+            </a:r>
+            <a:endParaRPr lang="en-US" sz="1200" dirty="0"/>
+          </a:p>
+        </p:txBody>
+      </p:sp>
+      <p:sp>
+        <p:nvSpPr>
+          <p:cNvPr id="27" name="arrow-315"/>
+          <p:cNvSpPr/>
+          <p:nvPr/>
+        </p:nvSpPr>
+        <p:spPr>
+          <a:xfrm>
+            <a:off x="4937760" y="2432304"/>
+            <a:ext cx="109728" cy="914"/>
+          </a:xfrm>
+          <a:prstGeom prst="line">
+            <a:avLst/>
+          </a:prstGeom>
+          <a:noFill/>
+          <a:ln w="19050">
+            <a:solidFill>
+              <a:srgbClr val="5B6B66"/>
+            </a:solidFill>
+            <a:prstDash val="solid"/>
+            <a:tailEnd type="triangle"/>
+          </a:ln>
+        </p:spPr>
+      </p:sp>
+      <p:sp>
+        <p:nvSpPr>
+          <p:cNvPr id="28" name="text-316"/>
+          <p:cNvSpPr txBox="1"/>
+          <p:nvPr/>
+        </p:nvSpPr>
+        <p:spPr>
+          <a:xfrm>
+            <a:off x="3703320" y="2926080"/>
+            <a:ext cx="2743200" cy="228600"/>
           </a:xfrm>
           <a:prstGeom prst="rect">
             <a:avLst/>
@@ -8712,51 +8991,1270 @@
           <a:lstStyle/>
           <a:p>
             <a:pPr indent="0" marL="0">
-              <a:spcAft>
-                <a:spcPts val="600"/>
-              </a:spcAft>
-              <a:buNone/>
-            </a:pPr>
-            <a:r>
-              <a:rPr lang="en-US" sz="1500" dirty="0">
+              <a:buNone/>
+            </a:pPr>
+            <a:r>
+              <a:rPr lang="en-US" sz="1100" i="1" dirty="0">
                 <a:solidFill>
                   <a:schemeClr val="accent5"/>
                 </a:solidFill>
               </a:rPr>
-              <a:t>langchain-community is no longer maintained.</a:t>
-            </a:r>
-            <a:endParaRPr lang="en-US" sz="1500" dirty="0"/>
-          </a:p>
-          <a:p>
-            <a:pPr indent="0" marL="0">
-              <a:spcAft>
-                <a:spcPts val="600"/>
-              </a:spcAft>
-              <a:buNone/>
-            </a:pPr>
-            <a:r>
-              <a:rPr lang="en-US" sz="1500" b="1" dirty="0">
+              <a:t>Write / ingest path</a:t>
+            </a:r>
+            <a:endParaRPr lang="en-US" sz="1100" dirty="0"/>
+          </a:p>
+        </p:txBody>
+      </p:sp>
+      <p:sp>
+        <p:nvSpPr>
+          <p:cNvPr id="29" name="card-317"/>
+          <p:cNvSpPr/>
+          <p:nvPr/>
+        </p:nvSpPr>
+        <p:spPr>
+          <a:xfrm>
+            <a:off x="3703320" y="3172968"/>
+            <a:ext cx="1828800" cy="713232"/>
+          </a:xfrm>
+          <a:prstGeom prst="roundRect">
+            <a:avLst>
+              <a:gd name="adj" fmla="val 15385"/>
+            </a:avLst>
+          </a:prstGeom>
+          <a:solidFill>
+            <a:schemeClr val="bg1"/>
+          </a:solidFill>
+          <a:ln w="12700">
+            <a:solidFill>
+              <a:schemeClr val="bg1"/>
+            </a:solidFill>
+            <a:prstDash val="solid"/>
+          </a:ln>
+        </p:spPr>
+      </p:sp>
+      <p:sp>
+        <p:nvSpPr>
+          <p:cNvPr id="30" name="box-label-318"/>
+          <p:cNvSpPr txBox="1"/>
+          <p:nvPr/>
+        </p:nvSpPr>
+        <p:spPr>
+          <a:xfrm>
+            <a:off x="3794760" y="3172968"/>
+            <a:ext cx="1645920" cy="713232"/>
+          </a:xfrm>
+          <a:prstGeom prst="rect">
+            <a:avLst/>
+          </a:prstGeom>
+          <a:noFill/>
+          <a:ln/>
+        </p:spPr>
+        <p:txBody>
+          <a:bodyPr wrap="square" lIns="0" tIns="0" rIns="0" bIns="0" rtlCol="0" anchor="ctr"/>
+          <a:lstStyle/>
+          <a:p>
+            <a:pPr algn="ctr" indent="0" marL="0">
+              <a:buNone/>
+            </a:pPr>
+            <a:r>
+              <a:rPr lang="en-US" sz="1200" b="1" dirty="0">
+                <a:solidFill>
+                  <a:schemeClr val="tx1"/>
+                </a:solidFill>
+              </a:rPr>
+              <a:t>Platform backend</a:t>
+            </a:r>
+            <a:endParaRPr lang="en-US" sz="1200" dirty="0"/>
+          </a:p>
+          <a:p>
+            <a:pPr algn="ctr" indent="0" marL="0">
+              <a:buNone/>
+            </a:pPr>
+            <a:r>
+              <a:rPr lang="en-US" sz="1100" dirty="0">
+                <a:solidFill>
+                  <a:schemeClr val="accent5"/>
+                </a:solidFill>
+              </a:rPr>
+              <a:t>auth, run ingestion</a:t>
+            </a:r>
+            <a:endParaRPr lang="en-US" sz="1200" dirty="0"/>
+          </a:p>
+        </p:txBody>
+      </p:sp>
+      <p:sp>
+        <p:nvSpPr>
+          <p:cNvPr id="31" name="card-319"/>
+          <p:cNvSpPr/>
+          <p:nvPr/>
+        </p:nvSpPr>
+        <p:spPr>
+          <a:xfrm>
+            <a:off x="6172200" y="3172968"/>
+            <a:ext cx="1828800" cy="713232"/>
+          </a:xfrm>
+          <a:prstGeom prst="roundRect">
+            <a:avLst>
+              <a:gd name="adj" fmla="val 15385"/>
+            </a:avLst>
+          </a:prstGeom>
+          <a:solidFill>
+            <a:schemeClr val="bg1"/>
+          </a:solidFill>
+          <a:ln w="12700">
+            <a:solidFill>
+              <a:schemeClr val="bg1"/>
+            </a:solidFill>
+            <a:prstDash val="solid"/>
+          </a:ln>
+        </p:spPr>
+      </p:sp>
+      <p:sp>
+        <p:nvSpPr>
+          <p:cNvPr id="32" name="box-label-320"/>
+          <p:cNvSpPr txBox="1"/>
+          <p:nvPr/>
+        </p:nvSpPr>
+        <p:spPr>
+          <a:xfrm>
+            <a:off x="6263640" y="3172968"/>
+            <a:ext cx="1645920" cy="713232"/>
+          </a:xfrm>
+          <a:prstGeom prst="rect">
+            <a:avLst/>
+          </a:prstGeom>
+          <a:noFill/>
+          <a:ln/>
+        </p:spPr>
+        <p:txBody>
+          <a:bodyPr wrap="square" lIns="0" tIns="0" rIns="0" bIns="0" rtlCol="0" anchor="ctr"/>
+          <a:lstStyle/>
+          <a:p>
+            <a:pPr algn="ctr" indent="0" marL="0">
+              <a:buNone/>
+            </a:pPr>
+            <a:r>
+              <a:rPr lang="en-US" sz="1200" b="1" dirty="0">
+                <a:solidFill>
+                  <a:schemeClr val="tx1"/>
+                </a:solidFill>
+              </a:rPr>
+              <a:t>Ingest queue</a:t>
+            </a:r>
+            <a:endParaRPr lang="en-US" sz="1200" dirty="0"/>
+          </a:p>
+          <a:p>
+            <a:pPr algn="ctr" indent="0" marL="0">
+              <a:buNone/>
+            </a:pPr>
+            <a:r>
+              <a:rPr lang="en-US" sz="1100" dirty="0">
+                <a:solidFill>
+                  <a:schemeClr val="accent5"/>
+                </a:solidFill>
+              </a:rPr>
+              <a:t>async workers, retries</a:t>
+            </a:r>
+            <a:endParaRPr lang="en-US" sz="1200" dirty="0"/>
+          </a:p>
+        </p:txBody>
+      </p:sp>
+      <p:sp>
+        <p:nvSpPr>
+          <p:cNvPr id="33" name="arrow-321"/>
+          <p:cNvSpPr/>
+          <p:nvPr/>
+        </p:nvSpPr>
+        <p:spPr>
+          <a:xfrm>
+            <a:off x="5532120" y="3529584"/>
+            <a:ext cx="640080" cy="914"/>
+          </a:xfrm>
+          <a:prstGeom prst="line">
+            <a:avLst/>
+          </a:prstGeom>
+          <a:noFill/>
+          <a:ln w="19050">
+            <a:solidFill>
+              <a:srgbClr val="E8A33D"/>
+            </a:solidFill>
+            <a:prstDash val="solid"/>
+            <a:tailEnd type="triangle"/>
+          </a:ln>
+        </p:spPr>
+      </p:sp>
+      <p:sp>
+        <p:nvSpPr>
+          <p:cNvPr id="34" name="text-322"/>
+          <p:cNvSpPr txBox="1"/>
+          <p:nvPr/>
+        </p:nvSpPr>
+        <p:spPr>
+          <a:xfrm>
+            <a:off x="5577840" y="3246120"/>
+            <a:ext cx="548640" cy="228600"/>
+          </a:xfrm>
+          <a:prstGeom prst="rect">
+            <a:avLst/>
+          </a:prstGeom>
+          <a:noFill/>
+          <a:ln/>
+        </p:spPr>
+        <p:txBody>
+          <a:bodyPr wrap="square" lIns="0" tIns="0" rIns="0" bIns="0" rtlCol="0" anchor="t"/>
+          <a:lstStyle/>
+          <a:p>
+            <a:pPr algn="ctr" indent="0" marL="0">
+              <a:buNone/>
+            </a:pPr>
+            <a:r>
+              <a:rPr lang="en-US" sz="1000" dirty="0">
+                <a:solidFill>
+                  <a:schemeClr val="accent5"/>
+                </a:solidFill>
+              </a:rPr>
+              <a:t>Redis</a:t>
+            </a:r>
+            <a:endParaRPr lang="en-US" sz="1000" dirty="0"/>
+          </a:p>
+        </p:txBody>
+      </p:sp>
+      <p:sp>
+        <p:nvSpPr>
+          <p:cNvPr id="35" name="text-323"/>
+          <p:cNvSpPr txBox="1"/>
+          <p:nvPr/>
+        </p:nvSpPr>
+        <p:spPr>
+          <a:xfrm>
+            <a:off x="3703320" y="4023360"/>
+            <a:ext cx="3200400" cy="228600"/>
+          </a:xfrm>
+          <a:prstGeom prst="rect">
+            <a:avLst/>
+          </a:prstGeom>
+          <a:noFill/>
+          <a:ln/>
+        </p:spPr>
+        <p:txBody>
+          <a:bodyPr wrap="square" lIns="0" tIns="0" rIns="0" bIns="0" rtlCol="0" anchor="t"/>
+          <a:lstStyle/>
+          <a:p>
+            <a:pPr indent="0" marL="0">
+              <a:buNone/>
+            </a:pPr>
+            <a:r>
+              <a:rPr lang="en-US" sz="1100" i="1" dirty="0">
+                <a:solidFill>
+                  <a:schemeClr val="accent5"/>
+                </a:solidFill>
+              </a:rPr>
+              <a:t>Deployment add-on (optional)</a:t>
+            </a:r>
+            <a:endParaRPr lang="en-US" sz="1100" dirty="0"/>
+          </a:p>
+        </p:txBody>
+      </p:sp>
+      <p:sp>
+        <p:nvSpPr>
+          <p:cNvPr id="36" name="card-324"/>
+          <p:cNvSpPr/>
+          <p:nvPr/>
+        </p:nvSpPr>
+        <p:spPr>
+          <a:xfrm>
+            <a:off x="3703320" y="4270248"/>
+            <a:ext cx="2377440" cy="713232"/>
+          </a:xfrm>
+          <a:prstGeom prst="roundRect">
+            <a:avLst>
+              <a:gd name="adj" fmla="val 15385"/>
+            </a:avLst>
+          </a:prstGeom>
+          <a:solidFill>
+            <a:schemeClr val="bg1"/>
+          </a:solidFill>
+          <a:ln w="12700">
+            <a:solidFill>
+              <a:schemeClr val="bg1"/>
+            </a:solidFill>
+            <a:prstDash val="solid"/>
+          </a:ln>
+        </p:spPr>
+      </p:sp>
+      <p:sp>
+        <p:nvSpPr>
+          <p:cNvPr id="37" name="box-label-325"/>
+          <p:cNvSpPr txBox="1"/>
+          <p:nvPr/>
+        </p:nvSpPr>
+        <p:spPr>
+          <a:xfrm>
+            <a:off x="3794760" y="4270248"/>
+            <a:ext cx="2194560" cy="713232"/>
+          </a:xfrm>
+          <a:prstGeom prst="rect">
+            <a:avLst/>
+          </a:prstGeom>
+          <a:noFill/>
+          <a:ln/>
+        </p:spPr>
+        <p:txBody>
+          <a:bodyPr wrap="square" lIns="0" tIns="0" rIns="0" bIns="0" rtlCol="0" anchor="ctr"/>
+          <a:lstStyle/>
+          <a:p>
+            <a:pPr algn="ctr" indent="0" marL="0">
+              <a:buNone/>
+            </a:pPr>
+            <a:r>
+              <a:rPr lang="en-US" sz="1200" b="1" dirty="0">
+                <a:solidFill>
+                  <a:schemeClr val="tx1"/>
+                </a:solidFill>
+              </a:rPr>
+              <a:t>Control plane</a:t>
+            </a:r>
+            <a:endParaRPr lang="en-US" sz="1200" dirty="0"/>
+          </a:p>
+          <a:p>
+            <a:pPr algn="ctr" indent="0" marL="0">
+              <a:buNone/>
+            </a:pPr>
+            <a:r>
+              <a:rPr lang="en-US" sz="1100" dirty="0">
+                <a:solidFill>
+                  <a:schemeClr val="accent5"/>
+                </a:solidFill>
+              </a:rPr>
+              <a:t>host backend, listener, operator</a:t>
+            </a:r>
+            <a:endParaRPr lang="en-US" sz="1200" dirty="0"/>
+          </a:p>
+        </p:txBody>
+      </p:sp>
+      <p:sp>
+        <p:nvSpPr>
+          <p:cNvPr id="38" name="card-326"/>
+          <p:cNvSpPr/>
+          <p:nvPr/>
+        </p:nvSpPr>
+        <p:spPr>
+          <a:xfrm>
+            <a:off x="6355080" y="4270248"/>
+            <a:ext cx="2523744" cy="713232"/>
+          </a:xfrm>
+          <a:prstGeom prst="roundRect">
+            <a:avLst>
+              <a:gd name="adj" fmla="val 15385"/>
+            </a:avLst>
+          </a:prstGeom>
+          <a:solidFill>
+            <a:schemeClr val="accent1"/>
+          </a:solidFill>
+          <a:ln w="12700">
+            <a:solidFill>
+              <a:schemeClr val="accent1"/>
+            </a:solidFill>
+            <a:prstDash val="solid"/>
+          </a:ln>
+        </p:spPr>
+      </p:sp>
+      <p:sp>
+        <p:nvSpPr>
+          <p:cNvPr id="39" name="box-label-327"/>
+          <p:cNvSpPr txBox="1"/>
+          <p:nvPr/>
+        </p:nvSpPr>
+        <p:spPr>
+          <a:xfrm>
+            <a:off x="6446520" y="4270248"/>
+            <a:ext cx="2340864" cy="713232"/>
+          </a:xfrm>
+          <a:prstGeom prst="rect">
+            <a:avLst/>
+          </a:prstGeom>
+          <a:noFill/>
+          <a:ln/>
+        </p:spPr>
+        <p:txBody>
+          <a:bodyPr wrap="square" lIns="0" tIns="0" rIns="0" bIns="0" rtlCol="0" anchor="ctr"/>
+          <a:lstStyle/>
+          <a:p>
+            <a:pPr algn="ctr" indent="0" marL="0">
+              <a:buNone/>
+            </a:pPr>
+            <a:r>
+              <a:rPr lang="en-US" sz="1200" b="1" dirty="0">
+                <a:solidFill>
+                  <a:schemeClr val="bg1"/>
+                </a:solidFill>
+              </a:rPr>
+              <a:t>Agent Servers</a:t>
+            </a:r>
+            <a:endParaRPr lang="en-US" sz="1200" dirty="0"/>
+          </a:p>
+          <a:p>
+            <a:pPr algn="ctr" indent="0" marL="0">
+              <a:buNone/>
+            </a:pPr>
+            <a:r>
+              <a:rPr lang="en-US" sz="1100" dirty="0">
+                <a:solidFill>
+                  <a:schemeClr val="bg1"/>
+                </a:solidFill>
+              </a:rPr>
+              <a:t>API pods + queue workers</a:t>
+            </a:r>
+            <a:endParaRPr lang="en-US" sz="1200" dirty="0"/>
+          </a:p>
+        </p:txBody>
+      </p:sp>
+      <p:sp>
+        <p:nvSpPr>
+          <p:cNvPr id="40" name="arrow-328"/>
+          <p:cNvSpPr/>
+          <p:nvPr/>
+        </p:nvSpPr>
+        <p:spPr>
+          <a:xfrm>
+            <a:off x="6080760" y="4626864"/>
+            <a:ext cx="274320" cy="914"/>
+          </a:xfrm>
+          <a:prstGeom prst="line">
+            <a:avLst/>
+          </a:prstGeom>
+          <a:noFill/>
+          <a:ln w="19050">
+            <a:solidFill>
+              <a:srgbClr val="5B6B66"/>
+            </a:solidFill>
+            <a:prstDash val="solid"/>
+            <a:tailEnd type="triangle"/>
+          </a:ln>
+        </p:spPr>
+      </p:sp>
+      <p:sp>
+        <p:nvSpPr>
+          <p:cNvPr id="41" name="arrow-329"/>
+          <p:cNvSpPr/>
+          <p:nvPr/>
+        </p:nvSpPr>
+        <p:spPr>
+          <a:xfrm flipV="1">
+            <a:off x="3291840" y="2432304"/>
+            <a:ext cx="411480" cy="265176"/>
+          </a:xfrm>
+          <a:prstGeom prst="line">
+            <a:avLst/>
+          </a:prstGeom>
+          <a:noFill/>
+          <a:ln w="19050">
+            <a:solidFill>
+              <a:srgbClr val="5B6B66"/>
+            </a:solidFill>
+            <a:prstDash val="solid"/>
+            <a:tailEnd type="triangle"/>
+          </a:ln>
+        </p:spPr>
+      </p:sp>
+      <p:sp>
+        <p:nvSpPr>
+          <p:cNvPr id="42" name="arrow-330"/>
+          <p:cNvSpPr/>
+          <p:nvPr/>
+        </p:nvSpPr>
+        <p:spPr>
+          <a:xfrm>
+            <a:off x="3291840" y="3154680"/>
+            <a:ext cx="411480" cy="374904"/>
+          </a:xfrm>
+          <a:prstGeom prst="line">
+            <a:avLst/>
+          </a:prstGeom>
+          <a:noFill/>
+          <a:ln w="19050">
+            <a:solidFill>
+              <a:srgbClr val="5B6B66"/>
+            </a:solidFill>
+            <a:prstDash val="solid"/>
+            <a:tailEnd type="triangle"/>
+          </a:ln>
+        </p:spPr>
+      </p:sp>
+      <p:sp>
+        <p:nvSpPr>
+          <p:cNvPr id="43" name="text-331"/>
+          <p:cNvSpPr txBox="1"/>
+          <p:nvPr/>
+        </p:nvSpPr>
+        <p:spPr>
+          <a:xfrm>
+            <a:off x="9326880" y="1481328"/>
+            <a:ext cx="2313432" cy="228600"/>
+          </a:xfrm>
+          <a:prstGeom prst="rect">
+            <a:avLst/>
+          </a:prstGeom>
+          <a:noFill/>
+          <a:ln/>
+        </p:spPr>
+        <p:txBody>
+          <a:bodyPr wrap="square" lIns="0" tIns="0" rIns="0" bIns="0" rtlCol="0" anchor="t"/>
+          <a:lstStyle/>
+          <a:p>
+            <a:pPr indent="0" marL="0">
+              <a:buNone/>
+            </a:pPr>
+            <a:r>
+              <a:rPr lang="en-US" sz="1000" b="1" spc="100" kern="0" dirty="0">
                 <a:solidFill>
                   <a:schemeClr val="accent3"/>
                 </a:solidFill>
               </a:rPr>
-              <a:t>Fix: </a:t>
-            </a:r>
-            <a:pPr indent="0" marL="0">
-              <a:spcAft>
-                <a:spcPts val="600"/>
-              </a:spcAft>
-              <a:buNone/>
-            </a:pPr>
-            <a:r>
-              <a:rPr lang="en-US" sz="1500" dirty="0">
+              <a:t>MANAGED SERVICES (EXTERNAL)</a:t>
+            </a:r>
+            <a:endParaRPr lang="en-US" sz="1000" dirty="0"/>
+          </a:p>
+        </p:txBody>
+      </p:sp>
+      <p:sp>
+        <p:nvSpPr>
+          <p:cNvPr id="44" name="card-332"/>
+          <p:cNvSpPr/>
+          <p:nvPr/>
+        </p:nvSpPr>
+        <p:spPr>
+          <a:xfrm>
+            <a:off x="9326880" y="1783080"/>
+            <a:ext cx="2313432" cy="585216"/>
+          </a:xfrm>
+          <a:prstGeom prst="roundRect">
+            <a:avLst>
+              <a:gd name="adj" fmla="val 18750"/>
+            </a:avLst>
+          </a:prstGeom>
+          <a:solidFill>
+            <a:schemeClr val="tx2"/>
+          </a:solidFill>
+          <a:ln w="12700">
+            <a:solidFill>
+              <a:schemeClr val="tx2"/>
+            </a:solidFill>
+            <a:prstDash val="solid"/>
+          </a:ln>
+        </p:spPr>
+      </p:sp>
+      <p:sp>
+        <p:nvSpPr>
+          <p:cNvPr id="45" name="box-label-333"/>
+          <p:cNvSpPr txBox="1"/>
+          <p:nvPr/>
+        </p:nvSpPr>
+        <p:spPr>
+          <a:xfrm>
+            <a:off x="9418320" y="1783080"/>
+            <a:ext cx="2130552" cy="585216"/>
+          </a:xfrm>
+          <a:prstGeom prst="rect">
+            <a:avLst/>
+          </a:prstGeom>
+          <a:noFill/>
+          <a:ln/>
+        </p:spPr>
+        <p:txBody>
+          <a:bodyPr wrap="square" lIns="0" tIns="0" rIns="0" bIns="0" rtlCol="0" anchor="ctr"/>
+          <a:lstStyle/>
+          <a:p>
+            <a:pPr algn="ctr" indent="0" marL="0">
+              <a:buNone/>
+            </a:pPr>
+            <a:r>
+              <a:rPr lang="en-US" sz="1200" b="1" dirty="0">
+                <a:solidFill>
+                  <a:schemeClr val="bg1"/>
+                </a:solidFill>
+              </a:rPr>
+              <a:t>ClickHouse</a:t>
+            </a:r>
+            <a:endParaRPr lang="en-US" sz="1200" dirty="0"/>
+          </a:p>
+          <a:p>
+            <a:pPr algn="ctr" indent="0" marL="0">
+              <a:buNone/>
+            </a:pPr>
+            <a:r>
+              <a:rPr lang="en-US" sz="1100" dirty="0">
+                <a:solidFill>
+                  <a:schemeClr val="accent4"/>
+                </a:solidFill>
+              </a:rPr>
+              <a:t>traces, feedback</a:t>
+            </a:r>
+            <a:endParaRPr lang="en-US" sz="1200" dirty="0"/>
+          </a:p>
+        </p:txBody>
+      </p:sp>
+      <p:sp>
+        <p:nvSpPr>
+          <p:cNvPr id="46" name="card-334"/>
+          <p:cNvSpPr/>
+          <p:nvPr/>
+        </p:nvSpPr>
+        <p:spPr>
+          <a:xfrm>
+            <a:off x="9326880" y="2459736"/>
+            <a:ext cx="2313432" cy="585216"/>
+          </a:xfrm>
+          <a:prstGeom prst="roundRect">
+            <a:avLst>
+              <a:gd name="adj" fmla="val 18750"/>
+            </a:avLst>
+          </a:prstGeom>
+          <a:solidFill>
+            <a:schemeClr val="tx2"/>
+          </a:solidFill>
+          <a:ln w="12700">
+            <a:solidFill>
+              <a:schemeClr val="tx2"/>
+            </a:solidFill>
+            <a:prstDash val="solid"/>
+          </a:ln>
+        </p:spPr>
+      </p:sp>
+      <p:sp>
+        <p:nvSpPr>
+          <p:cNvPr id="47" name="box-label-335"/>
+          <p:cNvSpPr txBox="1"/>
+          <p:nvPr/>
+        </p:nvSpPr>
+        <p:spPr>
+          <a:xfrm>
+            <a:off x="9418320" y="2459736"/>
+            <a:ext cx="2130552" cy="585216"/>
+          </a:xfrm>
+          <a:prstGeom prst="rect">
+            <a:avLst/>
+          </a:prstGeom>
+          <a:noFill/>
+          <a:ln/>
+        </p:spPr>
+        <p:txBody>
+          <a:bodyPr wrap="square" lIns="0" tIns="0" rIns="0" bIns="0" rtlCol="0" anchor="ctr"/>
+          <a:lstStyle/>
+          <a:p>
+            <a:pPr algn="ctr" indent="0" marL="0">
+              <a:buNone/>
+            </a:pPr>
+            <a:r>
+              <a:rPr lang="en-US" sz="1200" b="1" dirty="0">
+                <a:solidFill>
+                  <a:schemeClr val="bg1"/>
+                </a:solidFill>
+              </a:rPr>
+              <a:t>PostgreSQL</a:t>
+            </a:r>
+            <a:endParaRPr lang="en-US" sz="1200" dirty="0"/>
+          </a:p>
+          <a:p>
+            <a:pPr algn="ctr" indent="0" marL="0">
+              <a:buNone/>
+            </a:pPr>
+            <a:r>
+              <a:rPr lang="en-US" sz="1100" dirty="0">
+                <a:solidFill>
+                  <a:schemeClr val="accent4"/>
+                </a:solidFill>
+              </a:rPr>
+              <a:t>operational data</a:t>
+            </a:r>
+            <a:endParaRPr lang="en-US" sz="1200" dirty="0"/>
+          </a:p>
+        </p:txBody>
+      </p:sp>
+      <p:sp>
+        <p:nvSpPr>
+          <p:cNvPr id="48" name="card-336"/>
+          <p:cNvSpPr/>
+          <p:nvPr/>
+        </p:nvSpPr>
+        <p:spPr>
+          <a:xfrm>
+            <a:off x="9326880" y="3136392"/>
+            <a:ext cx="2313432" cy="585216"/>
+          </a:xfrm>
+          <a:prstGeom prst="roundRect">
+            <a:avLst>
+              <a:gd name="adj" fmla="val 18750"/>
+            </a:avLst>
+          </a:prstGeom>
+          <a:solidFill>
+            <a:schemeClr val="tx2"/>
+          </a:solidFill>
+          <a:ln w="12700">
+            <a:solidFill>
+              <a:schemeClr val="tx2"/>
+            </a:solidFill>
+            <a:prstDash val="solid"/>
+          </a:ln>
+        </p:spPr>
+      </p:sp>
+      <p:sp>
+        <p:nvSpPr>
+          <p:cNvPr id="49" name="box-label-337"/>
+          <p:cNvSpPr txBox="1"/>
+          <p:nvPr/>
+        </p:nvSpPr>
+        <p:spPr>
+          <a:xfrm>
+            <a:off x="9418320" y="3136392"/>
+            <a:ext cx="2130552" cy="585216"/>
+          </a:xfrm>
+          <a:prstGeom prst="rect">
+            <a:avLst/>
+          </a:prstGeom>
+          <a:noFill/>
+          <a:ln/>
+        </p:spPr>
+        <p:txBody>
+          <a:bodyPr wrap="square" lIns="0" tIns="0" rIns="0" bIns="0" rtlCol="0" anchor="ctr"/>
+          <a:lstStyle/>
+          <a:p>
+            <a:pPr algn="ctr" indent="0" marL="0">
+              <a:buNone/>
+            </a:pPr>
+            <a:r>
+              <a:rPr lang="en-US" sz="1200" b="1" dirty="0">
+                <a:solidFill>
+                  <a:schemeClr val="bg1"/>
+                </a:solidFill>
+              </a:rPr>
+              <a:t>Redis / Valkey</a:t>
+            </a:r>
+            <a:endParaRPr lang="en-US" sz="1200" dirty="0"/>
+          </a:p>
+          <a:p>
+            <a:pPr algn="ctr" indent="0" marL="0">
+              <a:buNone/>
+            </a:pPr>
+            <a:r>
+              <a:rPr lang="en-US" sz="1100" dirty="0">
+                <a:solidFill>
+                  <a:schemeClr val="accent4"/>
+                </a:solidFill>
+              </a:rPr>
+              <a:t>ingest queue, cache</a:t>
+            </a:r>
+            <a:endParaRPr lang="en-US" sz="1200" dirty="0"/>
+          </a:p>
+        </p:txBody>
+      </p:sp>
+      <p:sp>
+        <p:nvSpPr>
+          <p:cNvPr id="50" name="card-338"/>
+          <p:cNvSpPr/>
+          <p:nvPr/>
+        </p:nvSpPr>
+        <p:spPr>
+          <a:xfrm>
+            <a:off x="9326880" y="3813048"/>
+            <a:ext cx="2313432" cy="585216"/>
+          </a:xfrm>
+          <a:prstGeom prst="roundRect">
+            <a:avLst>
+              <a:gd name="adj" fmla="val 18750"/>
+            </a:avLst>
+          </a:prstGeom>
+          <a:solidFill>
+            <a:schemeClr val="tx2"/>
+          </a:solidFill>
+          <a:ln w="12700">
+            <a:solidFill>
+              <a:schemeClr val="tx2"/>
+            </a:solidFill>
+            <a:prstDash val="solid"/>
+          </a:ln>
+        </p:spPr>
+      </p:sp>
+      <p:sp>
+        <p:nvSpPr>
+          <p:cNvPr id="51" name="box-label-339"/>
+          <p:cNvSpPr txBox="1"/>
+          <p:nvPr/>
+        </p:nvSpPr>
+        <p:spPr>
+          <a:xfrm>
+            <a:off x="9418320" y="3813048"/>
+            <a:ext cx="2130552" cy="585216"/>
+          </a:xfrm>
+          <a:prstGeom prst="rect">
+            <a:avLst/>
+          </a:prstGeom>
+          <a:noFill/>
+          <a:ln/>
+        </p:spPr>
+        <p:txBody>
+          <a:bodyPr wrap="square" lIns="0" tIns="0" rIns="0" bIns="0" rtlCol="0" anchor="ctr"/>
+          <a:lstStyle/>
+          <a:p>
+            <a:pPr algn="ctr" indent="0" marL="0">
+              <a:buNone/>
+            </a:pPr>
+            <a:r>
+              <a:rPr lang="en-US" sz="1200" b="1" dirty="0">
+                <a:solidFill>
+                  <a:schemeClr val="bg1"/>
+                </a:solidFill>
+              </a:rPr>
+              <a:t>Blob storage</a:t>
+            </a:r>
+            <a:endParaRPr lang="en-US" sz="1200" dirty="0"/>
+          </a:p>
+          <a:p>
+            <a:pPr algn="ctr" indent="0" marL="0">
+              <a:buNone/>
+            </a:pPr>
+            <a:r>
+              <a:rPr lang="en-US" sz="1100" dirty="0">
+                <a:solidFill>
+                  <a:schemeClr val="accent4"/>
+                </a:solidFill>
+              </a:rPr>
+              <a:t>S3 / GCS / Azure: payloads</a:t>
+            </a:r>
+            <a:endParaRPr lang="en-US" sz="1200" dirty="0"/>
+          </a:p>
+        </p:txBody>
+      </p:sp>
+      <p:sp>
+        <p:nvSpPr>
+          <p:cNvPr id="52" name="card-340"/>
+          <p:cNvSpPr/>
+          <p:nvPr/>
+        </p:nvSpPr>
+        <p:spPr>
+          <a:xfrm>
+            <a:off x="9326880" y="4489704"/>
+            <a:ext cx="2313432" cy="585216"/>
+          </a:xfrm>
+          <a:prstGeom prst="roundRect">
+            <a:avLst>
+              <a:gd name="adj" fmla="val 18750"/>
+            </a:avLst>
+          </a:prstGeom>
+          <a:solidFill>
+            <a:schemeClr val="bg2"/>
+          </a:solidFill>
+          <a:ln w="12700">
+            <a:solidFill>
+              <a:schemeClr val="bg2"/>
+            </a:solidFill>
+            <a:prstDash val="solid"/>
+          </a:ln>
+        </p:spPr>
+      </p:sp>
+      <p:sp>
+        <p:nvSpPr>
+          <p:cNvPr id="53" name="box-label-341"/>
+          <p:cNvSpPr txBox="1"/>
+          <p:nvPr/>
+        </p:nvSpPr>
+        <p:spPr>
+          <a:xfrm>
+            <a:off x="9418320" y="4489704"/>
+            <a:ext cx="2130552" cy="585216"/>
+          </a:xfrm>
+          <a:prstGeom prst="rect">
+            <a:avLst/>
+          </a:prstGeom>
+          <a:noFill/>
+          <a:ln/>
+        </p:spPr>
+        <p:txBody>
+          <a:bodyPr wrap="square" lIns="0" tIns="0" rIns="0" bIns="0" rtlCol="0" anchor="ctr"/>
+          <a:lstStyle/>
+          <a:p>
+            <a:pPr algn="ctr" indent="0" marL="0">
+              <a:buNone/>
+            </a:pPr>
+            <a:r>
+              <a:rPr lang="en-US" sz="1200" b="1" dirty="0">
                 <a:solidFill>
                   <a:schemeClr val="tx1"/>
                 </a:solidFill>
               </a:rPr>
-              <a:t>Implemented the two-method Embeddings interface directly.</a:t>
-            </a:r>
-            <a:endParaRPr lang="en-US" sz="1500" dirty="0"/>
+              <a:t>Model APIs · IdP</a:t>
+            </a:r>
+            <a:endParaRPr lang="en-US" sz="1200" dirty="0"/>
+          </a:p>
+          <a:p>
+            <a:pPr algn="ctr" indent="0" marL="0">
+              <a:buNone/>
+            </a:pPr>
+            <a:r>
+              <a:rPr lang="en-US" sz="1100" dirty="0">
+                <a:solidFill>
+                  <a:schemeClr val="accent5"/>
+                </a:solidFill>
+              </a:rPr>
+              <a:t>Bedrock, Vertex, OIDC</a:t>
+            </a:r>
+            <a:endParaRPr lang="en-US" sz="1200" dirty="0"/>
+          </a:p>
+        </p:txBody>
+      </p:sp>
+      <p:sp>
+        <p:nvSpPr>
+          <p:cNvPr id="54" name="arrow-342"/>
+          <p:cNvSpPr/>
+          <p:nvPr/>
+        </p:nvSpPr>
+        <p:spPr>
+          <a:xfrm>
+            <a:off x="9006840" y="3291840"/>
+            <a:ext cx="320040" cy="914"/>
+          </a:xfrm>
+          <a:prstGeom prst="line">
+            <a:avLst/>
+          </a:prstGeom>
+          <a:noFill/>
+          <a:ln w="19050">
+            <a:solidFill>
+              <a:srgbClr val="5B6B66"/>
+            </a:solidFill>
+            <a:prstDash val="solid"/>
+            <a:tailEnd type="triangle"/>
+          </a:ln>
+        </p:spPr>
+      </p:sp>
+      <p:sp>
+        <p:nvSpPr>
+          <p:cNvPr id="55" name="arrow-343"/>
+          <p:cNvSpPr/>
+          <p:nvPr/>
+        </p:nvSpPr>
+        <p:spPr>
+          <a:xfrm flipH="1">
+            <a:off x="9006840" y="3520440"/>
+            <a:ext cx="320040" cy="914"/>
+          </a:xfrm>
+          <a:prstGeom prst="line">
+            <a:avLst/>
+          </a:prstGeom>
+          <a:noFill/>
+          <a:ln w="19050">
+            <a:solidFill>
+              <a:srgbClr val="5B6B66"/>
+            </a:solidFill>
+            <a:prstDash val="solid"/>
+            <a:tailEnd type="triangle"/>
+          </a:ln>
+        </p:spPr>
+      </p:sp>
+      <p:sp>
+        <p:nvSpPr>
+          <p:cNvPr id="56" name="card-344"/>
+          <p:cNvSpPr/>
+          <p:nvPr/>
+        </p:nvSpPr>
+        <p:spPr>
+          <a:xfrm>
+            <a:off x="548640" y="5285232"/>
+            <a:ext cx="2651760" cy="978408"/>
+          </a:xfrm>
+          <a:prstGeom prst="roundRect">
+            <a:avLst>
+              <a:gd name="adj" fmla="val 11215"/>
+            </a:avLst>
+          </a:prstGeom>
+          <a:solidFill>
+            <a:srgbClr val="FBEBD3"/>
+          </a:solidFill>
+          <a:ln w="12700">
+            <a:solidFill>
+              <a:srgbClr val="FBEBD3"/>
+            </a:solidFill>
+            <a:prstDash val="solid"/>
+          </a:ln>
+        </p:spPr>
+      </p:sp>
+      <p:sp>
+        <p:nvSpPr>
+          <p:cNvPr id="57" name="text-345"/>
+          <p:cNvSpPr txBox="1"/>
+          <p:nvPr/>
+        </p:nvSpPr>
+        <p:spPr>
+          <a:xfrm>
+            <a:off x="685800" y="5376672"/>
+            <a:ext cx="2377440" cy="841248"/>
+          </a:xfrm>
+          <a:prstGeom prst="rect">
+            <a:avLst/>
+          </a:prstGeom>
+          <a:noFill/>
+          <a:ln/>
+        </p:spPr>
+        <p:txBody>
+          <a:bodyPr wrap="square" lIns="0" tIns="0" rIns="0" bIns="0" rtlCol="0" anchor="t"/>
+          <a:lstStyle/>
+          <a:p>
+            <a:pPr indent="0" marL="0">
+              <a:buNone/>
+            </a:pPr>
+            <a:r>
+              <a:rPr lang="en-US" sz="1300" b="1" dirty="0">
+                <a:solidFill>
+                  <a:schemeClr val="tx1"/>
+                </a:solidFill>
+              </a:rPr>
+              <a:t>Write path</a:t>
+            </a:r>
+            <a:endParaRPr lang="en-US" sz="1400" dirty="0"/>
+          </a:p>
+          <a:p>
+            <a:pPr indent="0" marL="0">
+              <a:buNone/>
+            </a:pPr>
+            <a:r>
+              <a:rPr lang="en-US" sz="1200" dirty="0">
+                <a:solidFill>
+                  <a:schemeClr val="tx1"/>
+                </a:solidFill>
+              </a:rPr>
+              <a:t>platform-backend 3→20, ingest queue 3→24; KEDA on Redis backlog</a:t>
+            </a:r>
+            <a:endParaRPr lang="en-US" sz="1400" dirty="0"/>
+          </a:p>
+        </p:txBody>
+      </p:sp>
+      <p:sp>
+        <p:nvSpPr>
+          <p:cNvPr id="58" name="card-346"/>
+          <p:cNvSpPr/>
+          <p:nvPr/>
+        </p:nvSpPr>
+        <p:spPr>
+          <a:xfrm>
+            <a:off x="3362249" y="5285232"/>
+            <a:ext cx="2651760" cy="978408"/>
+          </a:xfrm>
+          <a:prstGeom prst="roundRect">
+            <a:avLst>
+              <a:gd name="adj" fmla="val 11215"/>
+            </a:avLst>
+          </a:prstGeom>
+          <a:solidFill>
+            <a:schemeClr val="bg2"/>
+          </a:solidFill>
+          <a:ln w="12700">
+            <a:solidFill>
+              <a:schemeClr val="bg2"/>
+            </a:solidFill>
+            <a:prstDash val="solid"/>
+          </a:ln>
+        </p:spPr>
+      </p:sp>
+      <p:sp>
+        <p:nvSpPr>
+          <p:cNvPr id="59" name="text-347"/>
+          <p:cNvSpPr txBox="1"/>
+          <p:nvPr/>
+        </p:nvSpPr>
+        <p:spPr>
+          <a:xfrm>
+            <a:off x="3499409" y="5376672"/>
+            <a:ext cx="2377440" cy="841248"/>
+          </a:xfrm>
+          <a:prstGeom prst="rect">
+            <a:avLst/>
+          </a:prstGeom>
+          <a:noFill/>
+          <a:ln/>
+        </p:spPr>
+        <p:txBody>
+          <a:bodyPr wrap="square" lIns="0" tIns="0" rIns="0" bIns="0" rtlCol="0" anchor="t"/>
+          <a:lstStyle/>
+          <a:p>
+            <a:pPr indent="0" marL="0">
+              <a:buNone/>
+            </a:pPr>
+            <a:r>
+              <a:rPr lang="en-US" sz="1300" b="1" dirty="0">
+                <a:solidFill>
+                  <a:schemeClr val="tx1"/>
+                </a:solidFill>
+              </a:rPr>
+              <a:t>Read path</a:t>
+            </a:r>
+            <a:endParaRPr lang="en-US" sz="1400" dirty="0"/>
+          </a:p>
+          <a:p>
+            <a:pPr indent="0" marL="0">
+              <a:buNone/>
+            </a:pPr>
+            <a:r>
+              <a:rPr lang="en-US" sz="1200" dirty="0">
+                <a:solidFill>
+                  <a:schemeClr val="tx1"/>
+                </a:solidFill>
+              </a:rPr>
+              <a:t>backend 2→50 replicas; replicated ClickHouse cluster (3 nodes)</a:t>
+            </a:r>
+            <a:endParaRPr lang="en-US" sz="1400" dirty="0"/>
+          </a:p>
+        </p:txBody>
+      </p:sp>
+      <p:sp>
+        <p:nvSpPr>
+          <p:cNvPr id="60" name="card-348"/>
+          <p:cNvSpPr/>
+          <p:nvPr/>
+        </p:nvSpPr>
+        <p:spPr>
+          <a:xfrm>
+            <a:off x="6175858" y="5285232"/>
+            <a:ext cx="2651760" cy="978408"/>
+          </a:xfrm>
+          <a:prstGeom prst="roundRect">
+            <a:avLst>
+              <a:gd name="adj" fmla="val 11215"/>
+            </a:avLst>
+          </a:prstGeom>
+          <a:solidFill>
+            <a:srgbClr val="D7F0E7"/>
+          </a:solidFill>
+          <a:ln w="12700">
+            <a:solidFill>
+              <a:srgbClr val="D7F0E7"/>
+            </a:solidFill>
+            <a:prstDash val="solid"/>
+          </a:ln>
+        </p:spPr>
+      </p:sp>
+      <p:sp>
+        <p:nvSpPr>
+          <p:cNvPr id="61" name="text-349"/>
+          <p:cNvSpPr txBox="1"/>
+          <p:nvPr/>
+        </p:nvSpPr>
+        <p:spPr>
+          <a:xfrm>
+            <a:off x="6313018" y="5376672"/>
+            <a:ext cx="2377440" cy="841248"/>
+          </a:xfrm>
+          <a:prstGeom prst="rect">
+            <a:avLst/>
+          </a:prstGeom>
+          <a:noFill/>
+          <a:ln/>
+        </p:spPr>
+        <p:txBody>
+          <a:bodyPr wrap="square" lIns="0" tIns="0" rIns="0" bIns="0" rtlCol="0" anchor="t"/>
+          <a:lstStyle/>
+          <a:p>
+            <a:pPr indent="0" marL="0">
+              <a:buNone/>
+            </a:pPr>
+            <a:r>
+              <a:rPr lang="en-US" sz="1300" b="1" dirty="0">
+                <a:solidFill>
+                  <a:schemeClr val="tx1"/>
+                </a:solidFill>
+              </a:rPr>
+              <a:t>Agent runs</a:t>
+            </a:r>
+            <a:endParaRPr lang="en-US" sz="1400" dirty="0"/>
+          </a:p>
+          <a:p>
+            <a:pPr indent="0" marL="0">
+              <a:buNone/>
+            </a:pPr>
+            <a:r>
+              <a:rPr lang="en-US" sz="1200" dirty="0">
+                <a:solidFill>
+                  <a:schemeClr val="tx1"/>
+                </a:solidFill>
+              </a:rPr>
+              <a:t>workers = throughput × run time ÷ N_JOBS_PER_WORKER (default 10)</a:t>
+            </a:r>
+            <a:endParaRPr lang="en-US" sz="1400" dirty="0"/>
+          </a:p>
+        </p:txBody>
+      </p:sp>
+      <p:sp>
+        <p:nvSpPr>
+          <p:cNvPr id="62" name="card-350"/>
+          <p:cNvSpPr/>
+          <p:nvPr/>
+        </p:nvSpPr>
+        <p:spPr>
+          <a:xfrm>
+            <a:off x="8989466" y="5285232"/>
+            <a:ext cx="2651760" cy="978408"/>
+          </a:xfrm>
+          <a:prstGeom prst="roundRect">
+            <a:avLst>
+              <a:gd name="adj" fmla="val 11215"/>
+            </a:avLst>
+          </a:prstGeom>
+          <a:solidFill>
+            <a:schemeClr val="bg2"/>
+          </a:solidFill>
+          <a:ln w="12700">
+            <a:solidFill>
+              <a:schemeClr val="bg2"/>
+            </a:solidFill>
+            <a:prstDash val="solid"/>
+          </a:ln>
+        </p:spPr>
+      </p:sp>
+      <p:sp>
+        <p:nvSpPr>
+          <p:cNvPr id="63" name="text-351"/>
+          <p:cNvSpPr txBox="1"/>
+          <p:nvPr/>
+        </p:nvSpPr>
+        <p:spPr>
+          <a:xfrm>
+            <a:off x="9126626" y="5376672"/>
+            <a:ext cx="2377440" cy="841248"/>
+          </a:xfrm>
+          <a:prstGeom prst="rect">
+            <a:avLst/>
+          </a:prstGeom>
+          <a:noFill/>
+          <a:ln/>
+        </p:spPr>
+        <p:txBody>
+          <a:bodyPr wrap="square" lIns="0" tIns="0" rIns="0" bIns="0" rtlCol="0" anchor="t"/>
+          <a:lstStyle/>
+          <a:p>
+            <a:pPr indent="0" marL="0">
+              <a:buNone/>
+            </a:pPr>
+            <a:r>
+              <a:rPr lang="en-US" sz="1300" b="1" dirty="0">
+                <a:solidFill>
+                  <a:schemeClr val="tx1"/>
+                </a:solidFill>
+              </a:rPr>
+              <a:t>Data tier</a:t>
+            </a:r>
+            <a:endParaRPr lang="en-US" sz="1400" dirty="0"/>
+          </a:p>
+          <a:p>
+            <a:pPr indent="0" marL="0">
+              <a:buNone/>
+            </a:pPr>
+            <a:r>
+              <a:rPr lang="en-US" sz="1200" dirty="0">
+                <a:solidFill>
+                  <a:schemeClr val="tx1"/>
+                </a:solidFill>
+              </a:rPr>
+              <a:t>Redis up to 26 GB (external); ClickHouse disk sized per TTL day</a:t>
+            </a:r>
+            <a:endParaRPr lang="en-US" sz="1400" dirty="0"/>
           </a:p>
         </p:txBody>
       </p:sp>
@@ -8862,7 +10360,7 @@
                   <a:schemeClr val="accent3"/>
                 </a:solidFill>
               </a:rPr>
-              <a:t>LIVE DEMO · 5 MINUTES</a:t>
+              <a:t>LESSONS</a:t>
             </a:r>
             <a:endParaRPr lang="en-US" sz="1200" dirty="0"/>
           </a:p>
@@ -8900,7 +10398,7 @@
                   <a:schemeClr val="tx1"/>
                 </a:solidFill>
               </a:rPr>
-              <a:t>What I'll show you</a:t>
+              <a:t>What broke along the way, and the fix</a:t>
             </a:r>
             <a:endParaRPr lang="en-US" sz="3200" dirty="0"/>
           </a:p>
@@ -8908,183 +10406,18 @@
       </p:sp>
       <p:sp>
         <p:nvSpPr>
-          <p:cNvPr id="4" name="card-312"/>
-          <p:cNvSpPr/>
-          <p:nvPr/>
-        </p:nvSpPr>
-        <p:spPr>
-          <a:xfrm>
-            <a:off x="548640" y="1691640"/>
-            <a:ext cx="2606040" cy="3383280"/>
+          <p:cNvPr id="4" name="card-352"/>
+          <p:cNvSpPr/>
+          <p:nvPr/>
+        </p:nvSpPr>
+        <p:spPr>
+          <a:xfrm>
+            <a:off x="548640" y="1600200"/>
+            <a:ext cx="5440680" cy="1920240"/>
           </a:xfrm>
           <a:prstGeom prst="roundRect">
             <a:avLst>
-              <a:gd name="adj" fmla="val 4211"/>
-            </a:avLst>
-          </a:prstGeom>
-          <a:solidFill>
-            <a:schemeClr val="tx2"/>
-          </a:solidFill>
-          <a:ln w="12700">
-            <a:solidFill>
-              <a:schemeClr val="tx2"/>
-            </a:solidFill>
-            <a:prstDash val="solid"/>
-          </a:ln>
-        </p:spPr>
-      </p:sp>
-      <p:sp>
-        <p:nvSpPr>
-          <p:cNvPr id="5" name="text-313"/>
-          <p:cNvSpPr txBox="1"/>
-          <p:nvPr/>
-        </p:nvSpPr>
-        <p:spPr>
-          <a:xfrm>
-            <a:off x="777240" y="1920240"/>
-            <a:ext cx="1097280" cy="731520"/>
-          </a:xfrm>
-          <a:prstGeom prst="rect">
-            <a:avLst/>
-          </a:prstGeom>
-          <a:noFill/>
-          <a:ln/>
-        </p:spPr>
-        <p:txBody>
-          <a:bodyPr wrap="square" lIns="0" tIns="0" rIns="0" bIns="0" rtlCol="0" anchor="t"/>
-          <a:lstStyle/>
-          <a:p>
-            <a:pPr indent="0" marL="0">
-              <a:buNone/>
-            </a:pPr>
-            <a:r>
-              <a:rPr lang="en-US" sz="4000" b="1" dirty="0">
-                <a:solidFill>
-                  <a:schemeClr val="accent1"/>
-                </a:solidFill>
-                <a:latin typeface="Arial" pitchFamily="34" charset="0"/>
-                <a:ea typeface="Arial" pitchFamily="34" charset="-122"/>
-                <a:cs typeface="Arial" pitchFamily="34" charset="-120"/>
-              </a:rPr>
-              <a:t>01</a:t>
-            </a:r>
-            <a:endParaRPr lang="en-US" sz="4000" dirty="0"/>
-          </a:p>
-        </p:txBody>
-      </p:sp>
-      <p:sp>
-        <p:nvSpPr>
-          <p:cNvPr id="6" name="icon-bg-314"/>
-          <p:cNvSpPr/>
-          <p:nvPr/>
-        </p:nvSpPr>
-        <p:spPr>
-          <a:xfrm>
-            <a:off x="2377440" y="1965960"/>
-            <a:ext cx="548640" cy="548640"/>
-          </a:xfrm>
-          <a:prstGeom prst="ellipse">
-            <a:avLst/>
-          </a:prstGeom>
-          <a:solidFill>
-            <a:schemeClr val="accent1"/>
-          </a:solidFill>
-          <a:ln w="12700">
-            <a:solidFill>
-              <a:schemeClr val="accent1"/>
-            </a:solidFill>
-            <a:prstDash val="solid"/>
-          </a:ln>
-        </p:spPr>
-      </p:sp>
-      <p:pic>
-        <p:nvPicPr>
-          <p:cNvPr id="7" name="icon-315" descr="preencoded.png">    </p:cNvPr>
-          <p:cNvPicPr>
-            <a:picLocks noChangeAspect="1"/>
-          </p:cNvPicPr>
-          <p:nvPr/>
-        </p:nvPicPr>
-        <p:blipFill>
-          <a:blip r:embed="rId1"/>
-          <a:stretch>
-            <a:fillRect/>
-          </a:stretch>
-        </p:blipFill>
-        <p:spPr>
-          <a:xfrm>
-            <a:off x="2509114" y="2097634"/>
-            <a:ext cx="285293" cy="285293"/>
-          </a:xfrm>
-          <a:prstGeom prst="rect">
-            <a:avLst/>
-          </a:prstGeom>
-        </p:spPr>
-      </p:pic>
-      <p:sp>
-        <p:nvSpPr>
-          <p:cNvPr id="8" name="text-316"/>
-          <p:cNvSpPr txBox="1"/>
-          <p:nvPr/>
-        </p:nvSpPr>
-        <p:spPr>
-          <a:xfrm>
-            <a:off x="777240" y="2926080"/>
-            <a:ext cx="2148840" cy="1920240"/>
-          </a:xfrm>
-          <a:prstGeom prst="rect">
-            <a:avLst/>
-          </a:prstGeom>
-          <a:noFill/>
-          <a:ln/>
-        </p:spPr>
-        <p:txBody>
-          <a:bodyPr wrap="square" lIns="0" tIns="0" rIns="0" bIns="0" rtlCol="0" anchor="t"/>
-          <a:lstStyle/>
-          <a:p>
-            <a:pPr indent="0" marL="0">
-              <a:buNone/>
-            </a:pPr>
-            <a:r>
-              <a:rPr lang="en-US" sz="1600" b="1" dirty="0">
-                <a:solidFill>
-                  <a:schemeClr val="bg1"/>
-                </a:solidFill>
-              </a:rPr>
-              <a:t>Studio: remediation graph</a:t>
-            </a:r>
-            <a:endParaRPr lang="en-US" sz="1400" dirty="0"/>
-          </a:p>
-          <a:p>
-            <a:pPr indent="0" marL="0">
-              <a:buNone/>
-            </a:pPr>
-            <a:r>
-              <a:rPr lang="en-US" sz="1500" dirty="0">
-                <a:solidFill>
-                  <a:schemeClr val="accent4"/>
-                </a:solidFill>
-              </a:rPr>
-              <a:t>Run payments-api, pause at human_review, accept the risk, re-run and watch the rule get suppressed.</a:t>
-            </a:r>
-            <a:endParaRPr lang="en-US" sz="1400" dirty="0"/>
-          </a:p>
-        </p:txBody>
-      </p:sp>
-      <p:sp>
-        <p:nvSpPr>
-          <p:cNvPr id="9" name="card-317"/>
-          <p:cNvSpPr/>
-          <p:nvPr/>
-        </p:nvSpPr>
-        <p:spPr>
-          <a:xfrm>
-            <a:off x="3364992" y="1691640"/>
-            <a:ext cx="2606040" cy="3383280"/>
-          </a:xfrm>
-          <a:prstGeom prst="roundRect">
-            <a:avLst>
-              <a:gd name="adj" fmla="val 4211"/>
+              <a:gd name="adj" fmla="val 5714"/>
             </a:avLst>
           </a:prstGeom>
           <a:solidFill>
@@ -9100,63 +10433,24 @@
       </p:sp>
       <p:sp>
         <p:nvSpPr>
-          <p:cNvPr id="10" name="text-318"/>
-          <p:cNvSpPr txBox="1"/>
-          <p:nvPr/>
-        </p:nvSpPr>
-        <p:spPr>
-          <a:xfrm>
-            <a:off x="3593592" y="1920240"/>
-            <a:ext cx="1097280" cy="731520"/>
-          </a:xfrm>
-          <a:prstGeom prst="rect">
-            <a:avLst/>
-          </a:prstGeom>
-          <a:noFill/>
-          <a:ln/>
-        </p:spPr>
-        <p:txBody>
-          <a:bodyPr wrap="square" lIns="0" tIns="0" rIns="0" bIns="0" rtlCol="0" anchor="t"/>
-          <a:lstStyle/>
-          <a:p>
-            <a:pPr indent="0" marL="0">
-              <a:buNone/>
-            </a:pPr>
-            <a:r>
-              <a:rPr lang="en-US" sz="4000" b="1" dirty="0">
-                <a:solidFill>
-                  <a:schemeClr val="accent3"/>
-                </a:solidFill>
-                <a:latin typeface="Arial" pitchFamily="34" charset="0"/>
-                <a:ea typeface="Arial" pitchFamily="34" charset="-122"/>
-                <a:cs typeface="Arial" pitchFamily="34" charset="-120"/>
-              </a:rPr>
-              <a:t>02</a:t>
-            </a:r>
-            <a:endParaRPr lang="en-US" sz="4000" dirty="0"/>
-          </a:p>
-        </p:txBody>
-      </p:sp>
-      <p:sp>
-        <p:nvSpPr>
-          <p:cNvPr id="11" name="icon-bg-319"/>
-          <p:cNvSpPr/>
-          <p:nvPr/>
-        </p:nvSpPr>
-        <p:spPr>
-          <a:xfrm>
-            <a:off x="5193792" y="1965960"/>
-            <a:ext cx="548640" cy="548640"/>
+          <p:cNvPr id="5" name="icon-bg-353"/>
+          <p:cNvSpPr/>
+          <p:nvPr/>
+        </p:nvSpPr>
+        <p:spPr>
+          <a:xfrm>
+            <a:off x="777240" y="1828800"/>
+            <a:ext cx="457200" cy="457200"/>
           </a:xfrm>
           <a:prstGeom prst="ellipse">
             <a:avLst/>
           </a:prstGeom>
           <a:solidFill>
-            <a:schemeClr val="accent4"/>
+            <a:schemeClr val="accent2"/>
           </a:solidFill>
           <a:ln w="12700">
             <a:solidFill>
-              <a:schemeClr val="accent4"/>
+              <a:schemeClr val="accent2"/>
             </a:solidFill>
             <a:prstDash val="solid"/>
           </a:ln>
@@ -9164,22 +10458,22 @@
       </p:sp>
       <p:pic>
         <p:nvPicPr>
-          <p:cNvPr id="12" name="icon-320" descr="preencoded.png">    </p:cNvPr>
+          <p:cNvPr id="6" name="icon-354" descr="preencoded.png">    </p:cNvPr>
           <p:cNvPicPr>
             <a:picLocks noChangeAspect="1"/>
           </p:cNvPicPr>
           <p:nvPr/>
         </p:nvPicPr>
         <p:blipFill>
-          <a:blip r:embed="rId2"/>
+          <a:blip r:embed="rId1"/>
           <a:stretch>
             <a:fillRect/>
           </a:stretch>
         </p:blipFill>
         <p:spPr>
           <a:xfrm>
-            <a:off x="5325466" y="2097634"/>
-            <a:ext cx="285293" cy="285293"/>
+            <a:off x="886968" y="1938528"/>
+            <a:ext cx="237744" cy="237744"/>
           </a:xfrm>
           <a:prstGeom prst="rect">
             <a:avLst/>
@@ -9188,14 +10482,50 @@
       </p:pic>
       <p:sp>
         <p:nvSpPr>
-          <p:cNvPr id="13" name="text-321"/>
+          <p:cNvPr id="7" name="text-355"/>
           <p:cNvSpPr txBox="1"/>
           <p:nvPr/>
         </p:nvSpPr>
         <p:spPr>
           <a:xfrm>
-            <a:off x="3593592" y="2926080"/>
-            <a:ext cx="2148840" cy="1920240"/>
+            <a:off x="1371600" y="1856232"/>
+            <a:ext cx="4434840" cy="411480"/>
+          </a:xfrm>
+          <a:prstGeom prst="rect">
+            <a:avLst/>
+          </a:prstGeom>
+          <a:noFill/>
+          <a:ln/>
+        </p:spPr>
+        <p:txBody>
+          <a:bodyPr wrap="square" lIns="0" tIns="0" rIns="0" bIns="0" rtlCol="0" anchor="ctr"/>
+          <a:lstStyle/>
+          <a:p>
+            <a:pPr indent="0" marL="0">
+              <a:buNone/>
+            </a:pPr>
+            <a:r>
+              <a:rPr lang="en-US" sz="1600" b="1" dirty="0">
+                <a:solidFill>
+                  <a:schemeClr val="tx1"/>
+                </a:solidFill>
+              </a:rPr>
+              <a:t>Server rejected my graph</a:t>
+            </a:r>
+            <a:endParaRPr lang="en-US" sz="1600" dirty="0"/>
+          </a:p>
+        </p:txBody>
+      </p:sp>
+      <p:sp>
+        <p:nvSpPr>
+          <p:cNvPr id="8" name="text-356"/>
+          <p:cNvSpPr txBox="1"/>
+          <p:nvPr/>
+        </p:nvSpPr>
+        <p:spPr>
+          <a:xfrm>
+            <a:off x="777240" y="2423160"/>
+            <a:ext cx="4983480" cy="1005840"/>
           </a:xfrm>
           <a:prstGeom prst="rect">
             <a:avLst/>
@@ -9208,48 +10538,68 @@
           <a:lstStyle/>
           <a:p>
             <a:pPr indent="0" marL="0">
-              <a:buNone/>
-            </a:pPr>
-            <a:r>
-              <a:rPr lang="en-US" sz="1600" b="1" dirty="0">
+              <a:spcAft>
+                <a:spcPts val="600"/>
+              </a:spcAft>
+              <a:buNone/>
+            </a:pPr>
+            <a:r>
+              <a:rPr lang="en-US" sz="1500" dirty="0">
+                <a:solidFill>
+                  <a:schemeClr val="accent5"/>
+                </a:solidFill>
+              </a:rPr>
+              <a:t>Agent Server refuses graphs compiled with their own checkpointer.</a:t>
+            </a:r>
+            <a:endParaRPr lang="en-US" sz="1500" dirty="0"/>
+          </a:p>
+          <a:p>
+            <a:pPr indent="0" marL="0">
+              <a:spcAft>
+                <a:spcPts val="600"/>
+              </a:spcAft>
+              <a:buNone/>
+            </a:pPr>
+            <a:r>
+              <a:rPr lang="en-US" sz="1500" b="1" dirty="0">
+                <a:solidFill>
+                  <a:schemeClr val="accent3"/>
+                </a:solidFill>
+              </a:rPr>
+              <a:t>Fix: </a:t>
+            </a:r>
+            <a:pPr indent="0" marL="0">
+              <a:spcAft>
+                <a:spcPts val="600"/>
+              </a:spcAft>
+              <a:buNone/>
+            </a:pPr>
+            <a:r>
+              <a:rPr lang="en-US" sz="1500" dirty="0">
                 <a:solidFill>
                   <a:schemeClr val="tx1"/>
                 </a:solidFill>
               </a:rPr>
-              <a:t>LangSmith: supervisor trace</a:t>
-            </a:r>
-            <a:endParaRPr lang="en-US" sz="1400" dirty="0"/>
-          </a:p>
-          <a:p>
-            <a:pPr indent="0" marL="0">
-              <a:buNone/>
-            </a:pPr>
-            <a:r>
-              <a:rPr lang="en-US" sz="1500" dirty="0">
-                <a:solidFill>
-                  <a:schemeClr val="accent5"/>
-                </a:solidFill>
-              </a:rPr>
-              <a:t>Parallel delegation and nested subagent traces, with tokens and latency per step.</a:t>
-            </a:r>
-            <a:endParaRPr lang="en-US" sz="1400" dirty="0"/>
-          </a:p>
-        </p:txBody>
-      </p:sp>
-      <p:sp>
-        <p:nvSpPr>
-          <p:cNvPr id="14" name="card-322"/>
-          <p:cNvSpPr/>
-          <p:nvPr/>
-        </p:nvSpPr>
-        <p:spPr>
-          <a:xfrm>
-            <a:off x="6181344" y="1691640"/>
-            <a:ext cx="2606040" cy="3383280"/>
+              <a:t>Export via build_*(checkpointer=None); add InMemorySaver only for local runs.</a:t>
+            </a:r>
+            <a:endParaRPr lang="en-US" sz="1500" dirty="0"/>
+          </a:p>
+        </p:txBody>
+      </p:sp>
+      <p:sp>
+        <p:nvSpPr>
+          <p:cNvPr id="9" name="card-357"/>
+          <p:cNvSpPr/>
+          <p:nvPr/>
+        </p:nvSpPr>
+        <p:spPr>
+          <a:xfrm>
+            <a:off x="6199632" y="1600200"/>
+            <a:ext cx="5440680" cy="1920240"/>
           </a:xfrm>
           <a:prstGeom prst="roundRect">
             <a:avLst>
-              <a:gd name="adj" fmla="val 4211"/>
+              <a:gd name="adj" fmla="val 5714"/>
             </a:avLst>
           </a:prstGeom>
           <a:solidFill>
@@ -9265,63 +10615,24 @@
       </p:sp>
       <p:sp>
         <p:nvSpPr>
-          <p:cNvPr id="15" name="text-323"/>
-          <p:cNvSpPr txBox="1"/>
-          <p:nvPr/>
-        </p:nvSpPr>
-        <p:spPr>
-          <a:xfrm>
-            <a:off x="6409944" y="1920240"/>
-            <a:ext cx="1097280" cy="731520"/>
-          </a:xfrm>
-          <a:prstGeom prst="rect">
-            <a:avLst/>
-          </a:prstGeom>
-          <a:noFill/>
-          <a:ln/>
-        </p:spPr>
-        <p:txBody>
-          <a:bodyPr wrap="square" lIns="0" tIns="0" rIns="0" bIns="0" rtlCol="0" anchor="t"/>
-          <a:lstStyle/>
-          <a:p>
-            <a:pPr indent="0" marL="0">
-              <a:buNone/>
-            </a:pPr>
-            <a:r>
-              <a:rPr lang="en-US" sz="4000" b="1" dirty="0">
-                <a:solidFill>
-                  <a:schemeClr val="accent3"/>
-                </a:solidFill>
-                <a:latin typeface="Arial" pitchFamily="34" charset="0"/>
-                <a:ea typeface="Arial" pitchFamily="34" charset="-122"/>
-                <a:cs typeface="Arial" pitchFamily="34" charset="-120"/>
-              </a:rPr>
-              <a:t>03</a:t>
-            </a:r>
-            <a:endParaRPr lang="en-US" sz="4000" dirty="0"/>
-          </a:p>
-        </p:txBody>
-      </p:sp>
-      <p:sp>
-        <p:nvSpPr>
-          <p:cNvPr id="16" name="icon-bg-324"/>
-          <p:cNvSpPr/>
-          <p:nvPr/>
-        </p:nvSpPr>
-        <p:spPr>
-          <a:xfrm>
-            <a:off x="8010144" y="1965960"/>
-            <a:ext cx="548640" cy="548640"/>
+          <p:cNvPr id="10" name="icon-bg-358"/>
+          <p:cNvSpPr/>
+          <p:nvPr/>
+        </p:nvSpPr>
+        <p:spPr>
+          <a:xfrm>
+            <a:off x="6428232" y="1828800"/>
+            <a:ext cx="457200" cy="457200"/>
           </a:xfrm>
           <a:prstGeom prst="ellipse">
             <a:avLst/>
           </a:prstGeom>
           <a:solidFill>
-            <a:schemeClr val="accent4"/>
+            <a:schemeClr val="accent2"/>
           </a:solidFill>
           <a:ln w="12700">
             <a:solidFill>
-              <a:schemeClr val="accent4"/>
+              <a:schemeClr val="accent2"/>
             </a:solidFill>
             <a:prstDash val="solid"/>
           </a:ln>
@@ -9329,22 +10640,22 @@
       </p:sp>
       <p:pic>
         <p:nvPicPr>
-          <p:cNvPr id="17" name="icon-325" descr="preencoded.png">    </p:cNvPr>
+          <p:cNvPr id="11" name="icon-359" descr="preencoded.png">    </p:cNvPr>
           <p:cNvPicPr>
             <a:picLocks noChangeAspect="1"/>
           </p:cNvPicPr>
           <p:nvPr/>
         </p:nvPicPr>
         <p:blipFill>
-          <a:blip r:embed="rId3"/>
+          <a:blip r:embed="rId2"/>
           <a:stretch>
             <a:fillRect/>
           </a:stretch>
         </p:blipFill>
         <p:spPr>
           <a:xfrm>
-            <a:off x="8141818" y="2097634"/>
-            <a:ext cx="285293" cy="285293"/>
+            <a:off x="6537960" y="1938528"/>
+            <a:ext cx="237744" cy="237744"/>
           </a:xfrm>
           <a:prstGeom prst="rect">
             <a:avLst/>
@@ -9353,14 +10664,50 @@
       </p:pic>
       <p:sp>
         <p:nvSpPr>
-          <p:cNvPr id="18" name="text-326"/>
+          <p:cNvPr id="12" name="text-360"/>
           <p:cNvSpPr txBox="1"/>
           <p:nvPr/>
         </p:nvSpPr>
         <p:spPr>
           <a:xfrm>
-            <a:off x="6409944" y="2926080"/>
-            <a:ext cx="2148840" cy="1920240"/>
+            <a:off x="7022592" y="1856232"/>
+            <a:ext cx="4434840" cy="411480"/>
+          </a:xfrm>
+          <a:prstGeom prst="rect">
+            <a:avLst/>
+          </a:prstGeom>
+          <a:noFill/>
+          <a:ln/>
+        </p:spPr>
+        <p:txBody>
+          <a:bodyPr wrap="square" lIns="0" tIns="0" rIns="0" bIns="0" rtlCol="0" anchor="ctr"/>
+          <a:lstStyle/>
+          <a:p>
+            <a:pPr indent="0" marL="0">
+              <a:buNone/>
+            </a:pPr>
+            <a:r>
+              <a:rPr lang="en-US" sz="1600" b="1" dirty="0">
+                <a:solidFill>
+                  <a:schemeClr val="tx1"/>
+                </a:solidFill>
+              </a:rPr>
+              <a:t>Subagent results vanished</a:t>
+            </a:r>
+            <a:endParaRPr lang="en-US" sz="1600" dirty="0"/>
+          </a:p>
+        </p:txBody>
+      </p:sp>
+      <p:sp>
+        <p:nvSpPr>
+          <p:cNvPr id="13" name="text-361"/>
+          <p:cNvSpPr txBox="1"/>
+          <p:nvPr/>
+        </p:nvSpPr>
+        <p:spPr>
+          <a:xfrm>
+            <a:off x="6428232" y="2423160"/>
+            <a:ext cx="4983480" cy="1005840"/>
           </a:xfrm>
           <a:prstGeom prst="rect">
             <a:avLst/>
@@ -9373,48 +10720,68 @@
           <a:lstStyle/>
           <a:p>
             <a:pPr indent="0" marL="0">
-              <a:buNone/>
-            </a:pPr>
-            <a:r>
-              <a:rPr lang="en-US" sz="1600" b="1" dirty="0">
+              <a:spcAft>
+                <a:spcPts val="600"/>
+              </a:spcAft>
+              <a:buNone/>
+            </a:pPr>
+            <a:r>
+              <a:rPr lang="en-US" sz="1500" dirty="0">
+                <a:solidFill>
+                  <a:schemeClr val="accent5"/>
+                </a:solidFill>
+              </a:rPr>
+              <a:t>Supervisors only see a subagent's final message, not its tool calls.</a:t>
+            </a:r>
+            <a:endParaRPr lang="en-US" sz="1500" dirty="0"/>
+          </a:p>
+          <a:p>
+            <a:pPr indent="0" marL="0">
+              <a:spcAft>
+                <a:spcPts val="600"/>
+              </a:spcAft>
+              <a:buNone/>
+            </a:pPr>
+            <a:r>
+              <a:rPr lang="en-US" sz="1500" b="1" dirty="0">
+                <a:solidFill>
+                  <a:schemeClr val="accent3"/>
+                </a:solidFill>
+              </a:rPr>
+              <a:t>Fix: </a:t>
+            </a:r>
+            <a:pPr indent="0" marL="0">
+              <a:spcAft>
+                <a:spcPts val="600"/>
+              </a:spcAft>
+              <a:buNone/>
+            </a:pPr>
+            <a:r>
+              <a:rPr lang="en-US" sz="1500" dirty="0">
                 <a:solidFill>
                   <a:schemeClr val="tx1"/>
                 </a:solidFill>
               </a:rPr>
-              <a:t>Prompt A/B experiments</a:t>
-            </a:r>
-            <a:endParaRPr lang="en-US" sz="1400" dirty="0"/>
-          </a:p>
-          <a:p>
-            <a:pPr indent="0" marL="0">
-              <a:buNone/>
-            </a:pPr>
-            <a:r>
-              <a:rPr lang="en-US" sz="1500" dirty="0">
-                <a:solidFill>
-                  <a:schemeClr val="accent5"/>
-                </a:solidFill>
-              </a:rPr>
-              <a:t>v1-baseline vs. v2-sla-first, compared per example.</a:t>
-            </a:r>
-            <a:endParaRPr lang="en-US" sz="1400" dirty="0"/>
-          </a:p>
-        </p:txBody>
-      </p:sp>
-      <p:sp>
-        <p:nvSpPr>
-          <p:cNvPr id="19" name="card-327"/>
-          <p:cNvSpPr/>
-          <p:nvPr/>
-        </p:nvSpPr>
-        <p:spPr>
-          <a:xfrm>
-            <a:off x="8997696" y="1691640"/>
-            <a:ext cx="2606040" cy="3383280"/>
+              <a:t>A FINAL_ANSWER_RULE in every specialist prompt, guarded by an eval.</a:t>
+            </a:r>
+            <a:endParaRPr lang="en-US" sz="1500" dirty="0"/>
+          </a:p>
+        </p:txBody>
+      </p:sp>
+      <p:sp>
+        <p:nvSpPr>
+          <p:cNvPr id="14" name="card-362"/>
+          <p:cNvSpPr/>
+          <p:nvPr/>
+        </p:nvSpPr>
+        <p:spPr>
+          <a:xfrm>
+            <a:off x="548640" y="3794760"/>
+            <a:ext cx="5440680" cy="1920240"/>
           </a:xfrm>
           <a:prstGeom prst="roundRect">
             <a:avLst>
-              <a:gd name="adj" fmla="val 4211"/>
+              <a:gd name="adj" fmla="val 5714"/>
             </a:avLst>
           </a:prstGeom>
           <a:solidFill>
@@ -9430,63 +10797,24 @@
       </p:sp>
       <p:sp>
         <p:nvSpPr>
-          <p:cNvPr id="20" name="text-328"/>
-          <p:cNvSpPr txBox="1"/>
-          <p:nvPr/>
-        </p:nvSpPr>
-        <p:spPr>
-          <a:xfrm>
-            <a:off x="9226296" y="1920240"/>
-            <a:ext cx="1097280" cy="731520"/>
-          </a:xfrm>
-          <a:prstGeom prst="rect">
-            <a:avLst/>
-          </a:prstGeom>
-          <a:noFill/>
-          <a:ln/>
-        </p:spPr>
-        <p:txBody>
-          <a:bodyPr wrap="square" lIns="0" tIns="0" rIns="0" bIns="0" rtlCol="0" anchor="t"/>
-          <a:lstStyle/>
-          <a:p>
-            <a:pPr indent="0" marL="0">
-              <a:buNone/>
-            </a:pPr>
-            <a:r>
-              <a:rPr lang="en-US" sz="4000" b="1" dirty="0">
-                <a:solidFill>
-                  <a:schemeClr val="accent3"/>
-                </a:solidFill>
-                <a:latin typeface="Arial" pitchFamily="34" charset="0"/>
-                <a:ea typeface="Arial" pitchFamily="34" charset="-122"/>
-                <a:cs typeface="Arial" pitchFamily="34" charset="-120"/>
-              </a:rPr>
-              <a:t>04</a:t>
-            </a:r>
-            <a:endParaRPr lang="en-US" sz="4000" dirty="0"/>
-          </a:p>
-        </p:txBody>
-      </p:sp>
-      <p:sp>
-        <p:nvSpPr>
-          <p:cNvPr id="21" name="icon-bg-329"/>
-          <p:cNvSpPr/>
-          <p:nvPr/>
-        </p:nvSpPr>
-        <p:spPr>
-          <a:xfrm>
-            <a:off x="10826496" y="1965960"/>
-            <a:ext cx="548640" cy="548640"/>
+          <p:cNvPr id="15" name="icon-bg-363"/>
+          <p:cNvSpPr/>
+          <p:nvPr/>
+        </p:nvSpPr>
+        <p:spPr>
+          <a:xfrm>
+            <a:off x="777240" y="4023360"/>
+            <a:ext cx="457200" cy="457200"/>
           </a:xfrm>
           <a:prstGeom prst="ellipse">
             <a:avLst/>
           </a:prstGeom>
           <a:solidFill>
-            <a:schemeClr val="accent4"/>
+            <a:schemeClr val="accent2"/>
           </a:solidFill>
           <a:ln w="12700">
             <a:solidFill>
-              <a:schemeClr val="accent4"/>
+              <a:schemeClr val="accent2"/>
             </a:solidFill>
             <a:prstDash val="solid"/>
           </a:ln>
@@ -9494,7 +10822,189 @@
       </p:sp>
       <p:pic>
         <p:nvPicPr>
-          <p:cNvPr id="22" name="icon-330" descr="preencoded.png">    </p:cNvPr>
+          <p:cNvPr id="16" name="icon-364" descr="preencoded.png">    </p:cNvPr>
+          <p:cNvPicPr>
+            <a:picLocks noChangeAspect="1"/>
+          </p:cNvPicPr>
+          <p:nvPr/>
+        </p:nvPicPr>
+        <p:blipFill>
+          <a:blip r:embed="rId3"/>
+          <a:stretch>
+            <a:fillRect/>
+          </a:stretch>
+        </p:blipFill>
+        <p:spPr>
+          <a:xfrm>
+            <a:off x="886968" y="4133088"/>
+            <a:ext cx="237744" cy="237744"/>
+          </a:xfrm>
+          <a:prstGeom prst="rect">
+            <a:avLst/>
+          </a:prstGeom>
+        </p:spPr>
+      </p:pic>
+      <p:sp>
+        <p:nvSpPr>
+          <p:cNvPr id="17" name="text-365"/>
+          <p:cNvSpPr txBox="1"/>
+          <p:nvPr/>
+        </p:nvSpPr>
+        <p:spPr>
+          <a:xfrm>
+            <a:off x="1371600" y="4050792"/>
+            <a:ext cx="4434840" cy="411480"/>
+          </a:xfrm>
+          <a:prstGeom prst="rect">
+            <a:avLst/>
+          </a:prstGeom>
+          <a:noFill/>
+          <a:ln/>
+        </p:spPr>
+        <p:txBody>
+          <a:bodyPr wrap="square" lIns="0" tIns="0" rIns="0" bIns="0" rtlCol="0" anchor="ctr"/>
+          <a:lstStyle/>
+          <a:p>
+            <a:pPr indent="0" marL="0">
+              <a:buNone/>
+            </a:pPr>
+            <a:r>
+              <a:rPr lang="en-US" sz="1600" b="1" dirty="0">
+                <a:solidFill>
+                  <a:schemeClr val="tx1"/>
+                </a:solidFill>
+              </a:rPr>
+              <a:t>Air-gap broke at first call</a:t>
+            </a:r>
+            <a:endParaRPr lang="en-US" sz="1600" dirty="0"/>
+          </a:p>
+        </p:txBody>
+      </p:sp>
+      <p:sp>
+        <p:nvSpPr>
+          <p:cNvPr id="18" name="text-366"/>
+          <p:cNvSpPr txBox="1"/>
+          <p:nvPr/>
+        </p:nvSpPr>
+        <p:spPr>
+          <a:xfrm>
+            <a:off x="777240" y="4617720"/>
+            <a:ext cx="4983480" cy="1005840"/>
+          </a:xfrm>
+          <a:prstGeom prst="rect">
+            <a:avLst/>
+          </a:prstGeom>
+          <a:noFill/>
+          <a:ln/>
+        </p:spPr>
+        <p:txBody>
+          <a:bodyPr wrap="square" lIns="0" tIns="0" rIns="0" bIns="0" rtlCol="0" anchor="t"/>
+          <a:lstStyle/>
+          <a:p>
+            <a:pPr indent="0" marL="0">
+              <a:spcAft>
+                <a:spcPts val="600"/>
+              </a:spcAft>
+              <a:buNone/>
+            </a:pPr>
+            <a:r>
+              <a:rPr lang="en-US" sz="1500" dirty="0">
+                <a:solidFill>
+                  <a:schemeClr val="accent5"/>
+                </a:solidFill>
+              </a:rPr>
+              <a:t>The local embedding model downloads on first use inside the container.</a:t>
+            </a:r>
+            <a:endParaRPr lang="en-US" sz="1500" dirty="0"/>
+          </a:p>
+          <a:p>
+            <a:pPr indent="0" marL="0">
+              <a:spcAft>
+                <a:spcPts val="600"/>
+              </a:spcAft>
+              <a:buNone/>
+            </a:pPr>
+            <a:r>
+              <a:rPr lang="en-US" sz="1500" b="1" dirty="0">
+                <a:solidFill>
+                  <a:schemeClr val="accent3"/>
+                </a:solidFill>
+              </a:rPr>
+              <a:t>Fix: </a:t>
+            </a:r>
+            <a:pPr indent="0" marL="0">
+              <a:spcAft>
+                <a:spcPts val="600"/>
+              </a:spcAft>
+              <a:buNone/>
+            </a:pPr>
+            <a:r>
+              <a:rPr lang="en-US" sz="1500" dirty="0">
+                <a:solidFill>
+                  <a:schemeClr val="tx1"/>
+                </a:solidFill>
+              </a:rPr>
+              <a:t>Pre-fetch it at image build with dockerfile_lines.</a:t>
+            </a:r>
+            <a:endParaRPr lang="en-US" sz="1500" dirty="0"/>
+          </a:p>
+        </p:txBody>
+      </p:sp>
+      <p:sp>
+        <p:nvSpPr>
+          <p:cNvPr id="19" name="card-367"/>
+          <p:cNvSpPr/>
+          <p:nvPr/>
+        </p:nvSpPr>
+        <p:spPr>
+          <a:xfrm>
+            <a:off x="6199632" y="3794760"/>
+            <a:ext cx="5440680" cy="1920240"/>
+          </a:xfrm>
+          <a:prstGeom prst="roundRect">
+            <a:avLst>
+              <a:gd name="adj" fmla="val 5714"/>
+            </a:avLst>
+          </a:prstGeom>
+          <a:solidFill>
+            <a:schemeClr val="bg2"/>
+          </a:solidFill>
+          <a:ln w="12700">
+            <a:solidFill>
+              <a:schemeClr val="bg2"/>
+            </a:solidFill>
+            <a:prstDash val="solid"/>
+          </a:ln>
+        </p:spPr>
+      </p:sp>
+      <p:sp>
+        <p:nvSpPr>
+          <p:cNvPr id="20" name="icon-bg-368"/>
+          <p:cNvSpPr/>
+          <p:nvPr/>
+        </p:nvSpPr>
+        <p:spPr>
+          <a:xfrm>
+            <a:off x="6428232" y="4023360"/>
+            <a:ext cx="457200" cy="457200"/>
+          </a:xfrm>
+          <a:prstGeom prst="ellipse">
+            <a:avLst/>
+          </a:prstGeom>
+          <a:solidFill>
+            <a:schemeClr val="accent2"/>
+          </a:solidFill>
+          <a:ln w="12700">
+            <a:solidFill>
+              <a:schemeClr val="accent2"/>
+            </a:solidFill>
+            <a:prstDash val="solid"/>
+          </a:ln>
+        </p:spPr>
+      </p:sp>
+      <p:pic>
+        <p:nvPicPr>
+          <p:cNvPr id="21" name="icon-369" descr="preencoded.png">    </p:cNvPr>
           <p:cNvPicPr>
             <a:picLocks noChangeAspect="1"/>
           </p:cNvPicPr>
@@ -9508,8 +11018,8 @@
         </p:blipFill>
         <p:spPr>
           <a:xfrm>
-            <a:off x="10958170" y="2097634"/>
-            <a:ext cx="285293" cy="285293"/>
+            <a:off x="6537960" y="4133088"/>
+            <a:ext cx="237744" cy="237744"/>
           </a:xfrm>
           <a:prstGeom prst="rect">
             <a:avLst/>
@@ -9518,14 +11028,50 @@
       </p:pic>
       <p:sp>
         <p:nvSpPr>
-          <p:cNvPr id="23" name="text-331"/>
+          <p:cNvPr id="22" name="text-370"/>
           <p:cNvSpPr txBox="1"/>
           <p:nvPr/>
         </p:nvSpPr>
         <p:spPr>
           <a:xfrm>
-            <a:off x="9226296" y="2926080"/>
-            <a:ext cx="2148840" cy="1920240"/>
+            <a:off x="7022592" y="4050792"/>
+            <a:ext cx="4434840" cy="411480"/>
+          </a:xfrm>
+          <a:prstGeom prst="rect">
+            <a:avLst/>
+          </a:prstGeom>
+          <a:noFill/>
+          <a:ln/>
+        </p:spPr>
+        <p:txBody>
+          <a:bodyPr wrap="square" lIns="0" tIns="0" rIns="0" bIns="0" rtlCol="0" anchor="ctr"/>
+          <a:lstStyle/>
+          <a:p>
+            <a:pPr indent="0" marL="0">
+              <a:buNone/>
+            </a:pPr>
+            <a:r>
+              <a:rPr lang="en-US" sz="1600" b="1" dirty="0">
+                <a:solidFill>
+                  <a:schemeClr val="tx1"/>
+                </a:solidFill>
+              </a:rPr>
+              <a:t>A dependency was sunsetting</a:t>
+            </a:r>
+            <a:endParaRPr lang="en-US" sz="1600" dirty="0"/>
+          </a:p>
+        </p:txBody>
+      </p:sp>
+      <p:sp>
+        <p:nvSpPr>
+          <p:cNvPr id="23" name="text-371"/>
+          <p:cNvSpPr txBox="1"/>
+          <p:nvPr/>
+        </p:nvSpPr>
+        <p:spPr>
+          <a:xfrm>
+            <a:off x="6428232" y="4617720"/>
+            <a:ext cx="4983480" cy="1005840"/>
           </a:xfrm>
           <a:prstGeom prst="rect">
             <a:avLst/>
@@ -9538,31 +11084,51 @@
           <a:lstStyle/>
           <a:p>
             <a:pPr indent="0" marL="0">
-              <a:buNone/>
-            </a:pPr>
-            <a:r>
-              <a:rPr lang="en-US" sz="1600" b="1" dirty="0">
+              <a:spcAft>
+                <a:spcPts val="600"/>
+              </a:spcAft>
+              <a:buNone/>
+            </a:pPr>
+            <a:r>
+              <a:rPr lang="en-US" sz="1500" dirty="0">
+                <a:solidFill>
+                  <a:schemeClr val="accent5"/>
+                </a:solidFill>
+              </a:rPr>
+              <a:t>langchain-community is no longer maintained.</a:t>
+            </a:r>
+            <a:endParaRPr lang="en-US" sz="1500" dirty="0"/>
+          </a:p>
+          <a:p>
+            <a:pPr indent="0" marL="0">
+              <a:spcAft>
+                <a:spcPts val="600"/>
+              </a:spcAft>
+              <a:buNone/>
+            </a:pPr>
+            <a:r>
+              <a:rPr lang="en-US" sz="1500" b="1" dirty="0">
+                <a:solidFill>
+                  <a:schemeClr val="accent3"/>
+                </a:solidFill>
+              </a:rPr>
+              <a:t>Fix: </a:t>
+            </a:r>
+            <a:pPr indent="0" marL="0">
+              <a:spcAft>
+                <a:spcPts val="600"/>
+              </a:spcAft>
+              <a:buNone/>
+            </a:pPr>
+            <a:r>
+              <a:rPr lang="en-US" sz="1500" dirty="0">
                 <a:solidFill>
                   <a:schemeClr val="tx1"/>
                 </a:solidFill>
               </a:rPr>
-              <a:t>Architecture walkthrough</a:t>
-            </a:r>
-            <a:endParaRPr lang="en-US" sz="1400" dirty="0"/>
-          </a:p>
-          <a:p>
-            <a:pPr indent="0" marL="0">
-              <a:buNone/>
-            </a:pPr>
-            <a:r>
-              <a:rPr lang="en-US" sz="1500" dirty="0">
-                <a:solidFill>
-                  <a:schemeClr val="accent5"/>
-                </a:solidFill>
-              </a:rPr>
-              <a:t>Where Postgres HA, auth and egress controls live.</a:t>
-            </a:r>
-            <a:endParaRPr lang="en-US" sz="1400" dirty="0"/>
+              <a:t>Implemented the two-method Embeddings interface directly.</a:t>
+            </a:r>
+            <a:endParaRPr lang="en-US" sz="1500" dirty="0"/>
           </a:p>
         </p:txBody>
       </p:sp>
@@ -9646,8 +11212,8 @@
         </p:nvSpPr>
         <p:spPr>
           <a:xfrm>
-            <a:off x="548640" y="548640"/>
-            <a:ext cx="8229600" cy="320040"/>
+            <a:off x="548640" y="292608"/>
+            <a:ext cx="8229600" cy="292608"/>
           </a:xfrm>
           <a:prstGeom prst="rect">
             <a:avLst/>
@@ -9665,10 +11231,10 @@
             <a:r>
               <a:rPr lang="en-US" sz="1200" b="1" spc="200" kern="0" dirty="0">
                 <a:solidFill>
-                  <a:schemeClr val="accent1"/>
-                </a:solidFill>
-              </a:rPr>
-              <a:t>HOW I'D RUN THIS WITH A CUSTOMER</a:t>
+                  <a:schemeClr val="accent3"/>
+                </a:solidFill>
+              </a:rPr>
+              <a:t>LIVE DEMO · 5 MINUTES</a:t>
             </a:r>
             <a:endParaRPr lang="en-US" sz="1200" dirty="0"/>
           </a:p>
@@ -9684,6 +11250,812 @@
         </p:nvSpPr>
         <p:spPr>
           <a:xfrm>
+            <a:off x="548640" y="585216"/>
+            <a:ext cx="11094415" cy="731520"/>
+          </a:xfrm>
+          <a:prstGeom prst="rect">
+            <a:avLst/>
+          </a:prstGeom>
+          <a:noFill/>
+          <a:ln/>
+        </p:spPr>
+        <p:txBody>
+          <a:bodyPr wrap="square" lIns="0" tIns="0" rIns="0" bIns="0" rtlCol="0" anchor="t"/>
+          <a:lstStyle/>
+          <a:p>
+            <a:pPr algn="l" indent="0" marL="0">
+              <a:buNone/>
+            </a:pPr>
+            <a:r>
+              <a:rPr lang="en-US" sz="3200" b="1" dirty="0">
+                <a:solidFill>
+                  <a:schemeClr val="tx1"/>
+                </a:solidFill>
+              </a:rPr>
+              <a:t>What I'll show you</a:t>
+            </a:r>
+            <a:endParaRPr lang="en-US" sz="3200" dirty="0"/>
+          </a:p>
+        </p:txBody>
+      </p:sp>
+      <p:sp>
+        <p:nvSpPr>
+          <p:cNvPr id="4" name="card-372"/>
+          <p:cNvSpPr/>
+          <p:nvPr/>
+        </p:nvSpPr>
+        <p:spPr>
+          <a:xfrm>
+            <a:off x="548640" y="1691640"/>
+            <a:ext cx="2606040" cy="3383280"/>
+          </a:xfrm>
+          <a:prstGeom prst="roundRect">
+            <a:avLst>
+              <a:gd name="adj" fmla="val 4211"/>
+            </a:avLst>
+          </a:prstGeom>
+          <a:solidFill>
+            <a:schemeClr val="tx2"/>
+          </a:solidFill>
+          <a:ln w="12700">
+            <a:solidFill>
+              <a:schemeClr val="tx2"/>
+            </a:solidFill>
+            <a:prstDash val="solid"/>
+          </a:ln>
+        </p:spPr>
+      </p:sp>
+      <p:sp>
+        <p:nvSpPr>
+          <p:cNvPr id="5" name="text-373"/>
+          <p:cNvSpPr txBox="1"/>
+          <p:nvPr/>
+        </p:nvSpPr>
+        <p:spPr>
+          <a:xfrm>
+            <a:off x="777240" y="1920240"/>
+            <a:ext cx="1097280" cy="731520"/>
+          </a:xfrm>
+          <a:prstGeom prst="rect">
+            <a:avLst/>
+          </a:prstGeom>
+          <a:noFill/>
+          <a:ln/>
+        </p:spPr>
+        <p:txBody>
+          <a:bodyPr wrap="square" lIns="0" tIns="0" rIns="0" bIns="0" rtlCol="0" anchor="t"/>
+          <a:lstStyle/>
+          <a:p>
+            <a:pPr indent="0" marL="0">
+              <a:buNone/>
+            </a:pPr>
+            <a:r>
+              <a:rPr lang="en-US" sz="4000" b="1" dirty="0">
+                <a:solidFill>
+                  <a:schemeClr val="accent1"/>
+                </a:solidFill>
+                <a:latin typeface="Arial" pitchFamily="34" charset="0"/>
+                <a:ea typeface="Arial" pitchFamily="34" charset="-122"/>
+                <a:cs typeface="Arial" pitchFamily="34" charset="-120"/>
+              </a:rPr>
+              <a:t>01</a:t>
+            </a:r>
+            <a:endParaRPr lang="en-US" sz="4000" dirty="0"/>
+          </a:p>
+        </p:txBody>
+      </p:sp>
+      <p:sp>
+        <p:nvSpPr>
+          <p:cNvPr id="6" name="icon-bg-374"/>
+          <p:cNvSpPr/>
+          <p:nvPr/>
+        </p:nvSpPr>
+        <p:spPr>
+          <a:xfrm>
+            <a:off x="2377440" y="1965960"/>
+            <a:ext cx="548640" cy="548640"/>
+          </a:xfrm>
+          <a:prstGeom prst="ellipse">
+            <a:avLst/>
+          </a:prstGeom>
+          <a:solidFill>
+            <a:schemeClr val="accent1"/>
+          </a:solidFill>
+          <a:ln w="12700">
+            <a:solidFill>
+              <a:schemeClr val="accent1"/>
+            </a:solidFill>
+            <a:prstDash val="solid"/>
+          </a:ln>
+        </p:spPr>
+      </p:sp>
+      <p:pic>
+        <p:nvPicPr>
+          <p:cNvPr id="7" name="icon-375" descr="preencoded.png">    </p:cNvPr>
+          <p:cNvPicPr>
+            <a:picLocks noChangeAspect="1"/>
+          </p:cNvPicPr>
+          <p:nvPr/>
+        </p:nvPicPr>
+        <p:blipFill>
+          <a:blip r:embed="rId1"/>
+          <a:stretch>
+            <a:fillRect/>
+          </a:stretch>
+        </p:blipFill>
+        <p:spPr>
+          <a:xfrm>
+            <a:off x="2509114" y="2097634"/>
+            <a:ext cx="285293" cy="285293"/>
+          </a:xfrm>
+          <a:prstGeom prst="rect">
+            <a:avLst/>
+          </a:prstGeom>
+        </p:spPr>
+      </p:pic>
+      <p:sp>
+        <p:nvSpPr>
+          <p:cNvPr id="8" name="text-376"/>
+          <p:cNvSpPr txBox="1"/>
+          <p:nvPr/>
+        </p:nvSpPr>
+        <p:spPr>
+          <a:xfrm>
+            <a:off x="777240" y="2926080"/>
+            <a:ext cx="2148840" cy="1920240"/>
+          </a:xfrm>
+          <a:prstGeom prst="rect">
+            <a:avLst/>
+          </a:prstGeom>
+          <a:noFill/>
+          <a:ln/>
+        </p:spPr>
+        <p:txBody>
+          <a:bodyPr wrap="square" lIns="0" tIns="0" rIns="0" bIns="0" rtlCol="0" anchor="t"/>
+          <a:lstStyle/>
+          <a:p>
+            <a:pPr indent="0" marL="0">
+              <a:buNone/>
+            </a:pPr>
+            <a:r>
+              <a:rPr lang="en-US" sz="1600" b="1" dirty="0">
+                <a:solidFill>
+                  <a:schemeClr val="bg1"/>
+                </a:solidFill>
+              </a:rPr>
+              <a:t>Studio: remediation graph</a:t>
+            </a:r>
+            <a:endParaRPr lang="en-US" sz="1400" dirty="0"/>
+          </a:p>
+          <a:p>
+            <a:pPr indent="0" marL="0">
+              <a:buNone/>
+            </a:pPr>
+            <a:r>
+              <a:rPr lang="en-US" sz="1500" dirty="0">
+                <a:solidFill>
+                  <a:schemeClr val="accent4"/>
+                </a:solidFill>
+              </a:rPr>
+              <a:t>Run payments-api, pause at human_review, accept the risk, re-run and watch the rule get suppressed.</a:t>
+            </a:r>
+            <a:endParaRPr lang="en-US" sz="1400" dirty="0"/>
+          </a:p>
+        </p:txBody>
+      </p:sp>
+      <p:sp>
+        <p:nvSpPr>
+          <p:cNvPr id="9" name="card-377"/>
+          <p:cNvSpPr/>
+          <p:nvPr/>
+        </p:nvSpPr>
+        <p:spPr>
+          <a:xfrm>
+            <a:off x="3364992" y="1691640"/>
+            <a:ext cx="2606040" cy="3383280"/>
+          </a:xfrm>
+          <a:prstGeom prst="roundRect">
+            <a:avLst>
+              <a:gd name="adj" fmla="val 4211"/>
+            </a:avLst>
+          </a:prstGeom>
+          <a:solidFill>
+            <a:schemeClr val="bg2"/>
+          </a:solidFill>
+          <a:ln w="12700">
+            <a:solidFill>
+              <a:schemeClr val="bg2"/>
+            </a:solidFill>
+            <a:prstDash val="solid"/>
+          </a:ln>
+        </p:spPr>
+      </p:sp>
+      <p:sp>
+        <p:nvSpPr>
+          <p:cNvPr id="10" name="text-378"/>
+          <p:cNvSpPr txBox="1"/>
+          <p:nvPr/>
+        </p:nvSpPr>
+        <p:spPr>
+          <a:xfrm>
+            <a:off x="3593592" y="1920240"/>
+            <a:ext cx="1097280" cy="731520"/>
+          </a:xfrm>
+          <a:prstGeom prst="rect">
+            <a:avLst/>
+          </a:prstGeom>
+          <a:noFill/>
+          <a:ln/>
+        </p:spPr>
+        <p:txBody>
+          <a:bodyPr wrap="square" lIns="0" tIns="0" rIns="0" bIns="0" rtlCol="0" anchor="t"/>
+          <a:lstStyle/>
+          <a:p>
+            <a:pPr indent="0" marL="0">
+              <a:buNone/>
+            </a:pPr>
+            <a:r>
+              <a:rPr lang="en-US" sz="4000" b="1" dirty="0">
+                <a:solidFill>
+                  <a:schemeClr val="accent3"/>
+                </a:solidFill>
+                <a:latin typeface="Arial" pitchFamily="34" charset="0"/>
+                <a:ea typeface="Arial" pitchFamily="34" charset="-122"/>
+                <a:cs typeface="Arial" pitchFamily="34" charset="-120"/>
+              </a:rPr>
+              <a:t>02</a:t>
+            </a:r>
+            <a:endParaRPr lang="en-US" sz="4000" dirty="0"/>
+          </a:p>
+        </p:txBody>
+      </p:sp>
+      <p:sp>
+        <p:nvSpPr>
+          <p:cNvPr id="11" name="icon-bg-379"/>
+          <p:cNvSpPr/>
+          <p:nvPr/>
+        </p:nvSpPr>
+        <p:spPr>
+          <a:xfrm>
+            <a:off x="5193792" y="1965960"/>
+            <a:ext cx="548640" cy="548640"/>
+          </a:xfrm>
+          <a:prstGeom prst="ellipse">
+            <a:avLst/>
+          </a:prstGeom>
+          <a:solidFill>
+            <a:schemeClr val="accent4"/>
+          </a:solidFill>
+          <a:ln w="12700">
+            <a:solidFill>
+              <a:schemeClr val="accent4"/>
+            </a:solidFill>
+            <a:prstDash val="solid"/>
+          </a:ln>
+        </p:spPr>
+      </p:sp>
+      <p:pic>
+        <p:nvPicPr>
+          <p:cNvPr id="12" name="icon-380" descr="preencoded.png">    </p:cNvPr>
+          <p:cNvPicPr>
+            <a:picLocks noChangeAspect="1"/>
+          </p:cNvPicPr>
+          <p:nvPr/>
+        </p:nvPicPr>
+        <p:blipFill>
+          <a:blip r:embed="rId2"/>
+          <a:stretch>
+            <a:fillRect/>
+          </a:stretch>
+        </p:blipFill>
+        <p:spPr>
+          <a:xfrm>
+            <a:off x="5325466" y="2097634"/>
+            <a:ext cx="285293" cy="285293"/>
+          </a:xfrm>
+          <a:prstGeom prst="rect">
+            <a:avLst/>
+          </a:prstGeom>
+        </p:spPr>
+      </p:pic>
+      <p:sp>
+        <p:nvSpPr>
+          <p:cNvPr id="13" name="text-381"/>
+          <p:cNvSpPr txBox="1"/>
+          <p:nvPr/>
+        </p:nvSpPr>
+        <p:spPr>
+          <a:xfrm>
+            <a:off x="3593592" y="2926080"/>
+            <a:ext cx="2148840" cy="1920240"/>
+          </a:xfrm>
+          <a:prstGeom prst="rect">
+            <a:avLst/>
+          </a:prstGeom>
+          <a:noFill/>
+          <a:ln/>
+        </p:spPr>
+        <p:txBody>
+          <a:bodyPr wrap="square" lIns="0" tIns="0" rIns="0" bIns="0" rtlCol="0" anchor="t"/>
+          <a:lstStyle/>
+          <a:p>
+            <a:pPr indent="0" marL="0">
+              <a:buNone/>
+            </a:pPr>
+            <a:r>
+              <a:rPr lang="en-US" sz="1600" b="1" dirty="0">
+                <a:solidFill>
+                  <a:schemeClr val="tx1"/>
+                </a:solidFill>
+              </a:rPr>
+              <a:t>LangSmith: supervisor trace</a:t>
+            </a:r>
+            <a:endParaRPr lang="en-US" sz="1400" dirty="0"/>
+          </a:p>
+          <a:p>
+            <a:pPr indent="0" marL="0">
+              <a:buNone/>
+            </a:pPr>
+            <a:r>
+              <a:rPr lang="en-US" sz="1500" dirty="0">
+                <a:solidFill>
+                  <a:schemeClr val="accent5"/>
+                </a:solidFill>
+              </a:rPr>
+              <a:t>Parallel delegation and nested subagent traces, with tokens and latency per step.</a:t>
+            </a:r>
+            <a:endParaRPr lang="en-US" sz="1400" dirty="0"/>
+          </a:p>
+        </p:txBody>
+      </p:sp>
+      <p:sp>
+        <p:nvSpPr>
+          <p:cNvPr id="14" name="card-382"/>
+          <p:cNvSpPr/>
+          <p:nvPr/>
+        </p:nvSpPr>
+        <p:spPr>
+          <a:xfrm>
+            <a:off x="6181344" y="1691640"/>
+            <a:ext cx="2606040" cy="3383280"/>
+          </a:xfrm>
+          <a:prstGeom prst="roundRect">
+            <a:avLst>
+              <a:gd name="adj" fmla="val 4211"/>
+            </a:avLst>
+          </a:prstGeom>
+          <a:solidFill>
+            <a:schemeClr val="bg2"/>
+          </a:solidFill>
+          <a:ln w="12700">
+            <a:solidFill>
+              <a:schemeClr val="bg2"/>
+            </a:solidFill>
+            <a:prstDash val="solid"/>
+          </a:ln>
+        </p:spPr>
+      </p:sp>
+      <p:sp>
+        <p:nvSpPr>
+          <p:cNvPr id="15" name="text-383"/>
+          <p:cNvSpPr txBox="1"/>
+          <p:nvPr/>
+        </p:nvSpPr>
+        <p:spPr>
+          <a:xfrm>
+            <a:off x="6409944" y="1920240"/>
+            <a:ext cx="1097280" cy="731520"/>
+          </a:xfrm>
+          <a:prstGeom prst="rect">
+            <a:avLst/>
+          </a:prstGeom>
+          <a:noFill/>
+          <a:ln/>
+        </p:spPr>
+        <p:txBody>
+          <a:bodyPr wrap="square" lIns="0" tIns="0" rIns="0" bIns="0" rtlCol="0" anchor="t"/>
+          <a:lstStyle/>
+          <a:p>
+            <a:pPr indent="0" marL="0">
+              <a:buNone/>
+            </a:pPr>
+            <a:r>
+              <a:rPr lang="en-US" sz="4000" b="1" dirty="0">
+                <a:solidFill>
+                  <a:schemeClr val="accent3"/>
+                </a:solidFill>
+                <a:latin typeface="Arial" pitchFamily="34" charset="0"/>
+                <a:ea typeface="Arial" pitchFamily="34" charset="-122"/>
+                <a:cs typeface="Arial" pitchFamily="34" charset="-120"/>
+              </a:rPr>
+              <a:t>03</a:t>
+            </a:r>
+            <a:endParaRPr lang="en-US" sz="4000" dirty="0"/>
+          </a:p>
+        </p:txBody>
+      </p:sp>
+      <p:sp>
+        <p:nvSpPr>
+          <p:cNvPr id="16" name="icon-bg-384"/>
+          <p:cNvSpPr/>
+          <p:nvPr/>
+        </p:nvSpPr>
+        <p:spPr>
+          <a:xfrm>
+            <a:off x="8010144" y="1965960"/>
+            <a:ext cx="548640" cy="548640"/>
+          </a:xfrm>
+          <a:prstGeom prst="ellipse">
+            <a:avLst/>
+          </a:prstGeom>
+          <a:solidFill>
+            <a:schemeClr val="accent4"/>
+          </a:solidFill>
+          <a:ln w="12700">
+            <a:solidFill>
+              <a:schemeClr val="accent4"/>
+            </a:solidFill>
+            <a:prstDash val="solid"/>
+          </a:ln>
+        </p:spPr>
+      </p:sp>
+      <p:pic>
+        <p:nvPicPr>
+          <p:cNvPr id="17" name="icon-385" descr="preencoded.png">    </p:cNvPr>
+          <p:cNvPicPr>
+            <a:picLocks noChangeAspect="1"/>
+          </p:cNvPicPr>
+          <p:nvPr/>
+        </p:nvPicPr>
+        <p:blipFill>
+          <a:blip r:embed="rId3"/>
+          <a:stretch>
+            <a:fillRect/>
+          </a:stretch>
+        </p:blipFill>
+        <p:spPr>
+          <a:xfrm>
+            <a:off x="8141818" y="2097634"/>
+            <a:ext cx="285293" cy="285293"/>
+          </a:xfrm>
+          <a:prstGeom prst="rect">
+            <a:avLst/>
+          </a:prstGeom>
+        </p:spPr>
+      </p:pic>
+      <p:sp>
+        <p:nvSpPr>
+          <p:cNvPr id="18" name="text-386"/>
+          <p:cNvSpPr txBox="1"/>
+          <p:nvPr/>
+        </p:nvSpPr>
+        <p:spPr>
+          <a:xfrm>
+            <a:off x="6409944" y="2926080"/>
+            <a:ext cx="2148840" cy="1920240"/>
+          </a:xfrm>
+          <a:prstGeom prst="rect">
+            <a:avLst/>
+          </a:prstGeom>
+          <a:noFill/>
+          <a:ln/>
+        </p:spPr>
+        <p:txBody>
+          <a:bodyPr wrap="square" lIns="0" tIns="0" rIns="0" bIns="0" rtlCol="0" anchor="t"/>
+          <a:lstStyle/>
+          <a:p>
+            <a:pPr indent="0" marL="0">
+              <a:buNone/>
+            </a:pPr>
+            <a:r>
+              <a:rPr lang="en-US" sz="1600" b="1" dirty="0">
+                <a:solidFill>
+                  <a:schemeClr val="tx1"/>
+                </a:solidFill>
+              </a:rPr>
+              <a:t>Prompt A/B experiments</a:t>
+            </a:r>
+            <a:endParaRPr lang="en-US" sz="1400" dirty="0"/>
+          </a:p>
+          <a:p>
+            <a:pPr indent="0" marL="0">
+              <a:buNone/>
+            </a:pPr>
+            <a:r>
+              <a:rPr lang="en-US" sz="1500" dirty="0">
+                <a:solidFill>
+                  <a:schemeClr val="accent5"/>
+                </a:solidFill>
+              </a:rPr>
+              <a:t>v1-baseline vs. v2-sla-first, compared per example.</a:t>
+            </a:r>
+            <a:endParaRPr lang="en-US" sz="1400" dirty="0"/>
+          </a:p>
+        </p:txBody>
+      </p:sp>
+      <p:sp>
+        <p:nvSpPr>
+          <p:cNvPr id="19" name="card-387"/>
+          <p:cNvSpPr/>
+          <p:nvPr/>
+        </p:nvSpPr>
+        <p:spPr>
+          <a:xfrm>
+            <a:off x="8997696" y="1691640"/>
+            <a:ext cx="2606040" cy="3383280"/>
+          </a:xfrm>
+          <a:prstGeom prst="roundRect">
+            <a:avLst>
+              <a:gd name="adj" fmla="val 4211"/>
+            </a:avLst>
+          </a:prstGeom>
+          <a:solidFill>
+            <a:schemeClr val="bg2"/>
+          </a:solidFill>
+          <a:ln w="12700">
+            <a:solidFill>
+              <a:schemeClr val="bg2"/>
+            </a:solidFill>
+            <a:prstDash val="solid"/>
+          </a:ln>
+        </p:spPr>
+      </p:sp>
+      <p:sp>
+        <p:nvSpPr>
+          <p:cNvPr id="20" name="text-388"/>
+          <p:cNvSpPr txBox="1"/>
+          <p:nvPr/>
+        </p:nvSpPr>
+        <p:spPr>
+          <a:xfrm>
+            <a:off x="9226296" y="1920240"/>
+            <a:ext cx="1097280" cy="731520"/>
+          </a:xfrm>
+          <a:prstGeom prst="rect">
+            <a:avLst/>
+          </a:prstGeom>
+          <a:noFill/>
+          <a:ln/>
+        </p:spPr>
+        <p:txBody>
+          <a:bodyPr wrap="square" lIns="0" tIns="0" rIns="0" bIns="0" rtlCol="0" anchor="t"/>
+          <a:lstStyle/>
+          <a:p>
+            <a:pPr indent="0" marL="0">
+              <a:buNone/>
+            </a:pPr>
+            <a:r>
+              <a:rPr lang="en-US" sz="4000" b="1" dirty="0">
+                <a:solidFill>
+                  <a:schemeClr val="accent3"/>
+                </a:solidFill>
+                <a:latin typeface="Arial" pitchFamily="34" charset="0"/>
+                <a:ea typeface="Arial" pitchFamily="34" charset="-122"/>
+                <a:cs typeface="Arial" pitchFamily="34" charset="-120"/>
+              </a:rPr>
+              <a:t>04</a:t>
+            </a:r>
+            <a:endParaRPr lang="en-US" sz="4000" dirty="0"/>
+          </a:p>
+        </p:txBody>
+      </p:sp>
+      <p:sp>
+        <p:nvSpPr>
+          <p:cNvPr id="21" name="icon-bg-389"/>
+          <p:cNvSpPr/>
+          <p:nvPr/>
+        </p:nvSpPr>
+        <p:spPr>
+          <a:xfrm>
+            <a:off x="10826496" y="1965960"/>
+            <a:ext cx="548640" cy="548640"/>
+          </a:xfrm>
+          <a:prstGeom prst="ellipse">
+            <a:avLst/>
+          </a:prstGeom>
+          <a:solidFill>
+            <a:schemeClr val="accent4"/>
+          </a:solidFill>
+          <a:ln w="12700">
+            <a:solidFill>
+              <a:schemeClr val="accent4"/>
+            </a:solidFill>
+            <a:prstDash val="solid"/>
+          </a:ln>
+        </p:spPr>
+      </p:sp>
+      <p:pic>
+        <p:nvPicPr>
+          <p:cNvPr id="22" name="icon-390" descr="preencoded.png">    </p:cNvPr>
+          <p:cNvPicPr>
+            <a:picLocks noChangeAspect="1"/>
+          </p:cNvPicPr>
+          <p:nvPr/>
+        </p:nvPicPr>
+        <p:blipFill>
+          <a:blip r:embed="rId4"/>
+          <a:stretch>
+            <a:fillRect/>
+          </a:stretch>
+        </p:blipFill>
+        <p:spPr>
+          <a:xfrm>
+            <a:off x="10958170" y="2097634"/>
+            <a:ext cx="285293" cy="285293"/>
+          </a:xfrm>
+          <a:prstGeom prst="rect">
+            <a:avLst/>
+          </a:prstGeom>
+        </p:spPr>
+      </p:pic>
+      <p:sp>
+        <p:nvSpPr>
+          <p:cNvPr id="23" name="text-391"/>
+          <p:cNvSpPr txBox="1"/>
+          <p:nvPr/>
+        </p:nvSpPr>
+        <p:spPr>
+          <a:xfrm>
+            <a:off x="9226296" y="2926080"/>
+            <a:ext cx="2148840" cy="1920240"/>
+          </a:xfrm>
+          <a:prstGeom prst="rect">
+            <a:avLst/>
+          </a:prstGeom>
+          <a:noFill/>
+          <a:ln/>
+        </p:spPr>
+        <p:txBody>
+          <a:bodyPr wrap="square" lIns="0" tIns="0" rIns="0" bIns="0" rtlCol="0" anchor="t"/>
+          <a:lstStyle/>
+          <a:p>
+            <a:pPr indent="0" marL="0">
+              <a:buNone/>
+            </a:pPr>
+            <a:r>
+              <a:rPr lang="en-US" sz="1600" b="1" dirty="0">
+                <a:solidFill>
+                  <a:schemeClr val="tx1"/>
+                </a:solidFill>
+              </a:rPr>
+              <a:t>Architecture walkthrough</a:t>
+            </a:r>
+            <a:endParaRPr lang="en-US" sz="1400" dirty="0"/>
+          </a:p>
+          <a:p>
+            <a:pPr indent="0" marL="0">
+              <a:buNone/>
+            </a:pPr>
+            <a:r>
+              <a:rPr lang="en-US" sz="1500" dirty="0">
+                <a:solidFill>
+                  <a:schemeClr val="accent5"/>
+                </a:solidFill>
+              </a:rPr>
+              <a:t>Where Postgres HA, auth and egress controls live.</a:t>
+            </a:r>
+            <a:endParaRPr lang="en-US" sz="1400" dirty="0"/>
+          </a:p>
+        </p:txBody>
+      </p:sp>
+      <p:sp>
+        <p:nvSpPr>
+          <p:cNvPr id="25" name="Slide Number Placeholder 0"/>
+          <p:cNvSpPr>
+            <a:spLocks noGrp="1"/>
+          </p:cNvSpPr>
+          <p:nvPr>
+            <p:ph type="sldNum" sz="quarter" idx="4294967295"/>
+          </p:nvPr>
+        </p:nvSpPr>
+        <p:spPr>
+          <a:xfrm>
+            <a:off x="11094415" y="6400800"/>
+            <a:ext cx="548640" cy="274320"/>
+          </a:xfrm>
+          <a:prstGeom prst="rect">
+            <a:avLst/>
+          </a:prstGeom>
+          <a:extLst>
+            <a:ext uri="{C572A759-6A51-4108-AA02-DFA0A04FC94B}">
+              <ma14:wrappingTextBoxFlag xmlns:ma14="http://schemas.microsoft.com/office/mac/drawingml/2011/main" val="0"/>
+            </a:ext>
+          </a:extLst>
+        </p:spPr>
+        <p:txBody>
+          <a:bodyPr/>
+          <a:lstStyle>
+            <a:lvl1pPr>
+              <a:defRPr sz="1000">
+                <a:solidFill>
+                  <a:schemeClr val="accent5"/>
+                </a:solidFill>
+              </a:defRPr>
+            </a:lvl1pPr>
+          </a:lstStyle>
+          <a:p>
+            <a:pPr algn="r"/>
+            <a:fld id="{F7021451-1387-4CA6-816F-3879F97B5CBC}" type="slidenum">
+              <a:rPr b="0" lang="en-US"/>
+              <a:t>15</a:t>
+            </a:fld>
+            <a:endParaRPr lang="en-US"/>
+          </a:p>
+        </p:txBody>
+      </p:sp>
+    </p:spTree>
+  </p:cSld>
+  <p:clrMapOvr>
+    <a:masterClrMapping/>
+  </p:clrMapOvr>
+</p:sld>
+</file>
+
+<file path=ppt/slides/slide16.xml><?xml version="1.0" encoding="utf-8"?>
+<p:sld xmlns:a="http://schemas.openxmlformats.org/drawingml/2006/main" xmlns:r="http://schemas.openxmlformats.org/officeDocument/2006/relationships" xmlns:p="http://schemas.openxmlformats.org/presentationml/2006/main">
+  <p:cSld name="Slide 16">
+    <p:spTree>
+      <p:nvGrpSpPr>
+        <p:cNvPr id="1" name=""/>
+        <p:cNvGrpSpPr/>
+        <p:nvPr/>
+      </p:nvGrpSpPr>
+      <p:grpSpPr>
+        <a:xfrm>
+          <a:off x="0" y="0"/>
+          <a:ext cx="0" cy="0"/>
+          <a:chOff x="0" y="0"/>
+          <a:chExt cx="0" cy="0"/>
+        </a:xfrm>
+      </p:grpSpPr>
+      <p:sp>
+        <p:nvSpPr>
+          <p:cNvPr id="2" name="Text 0"/>
+          <p:cNvSpPr/>
+          <p:nvPr>
+            <p:ph idx="100" type="body" hasCustomPrompt="1"/>
+          </p:nvPr>
+        </p:nvSpPr>
+        <p:spPr>
+          <a:xfrm>
+            <a:off x="548640" y="548640"/>
+            <a:ext cx="8229600" cy="320040"/>
+          </a:xfrm>
+          <a:prstGeom prst="rect">
+            <a:avLst/>
+          </a:prstGeom>
+          <a:noFill/>
+          <a:ln/>
+        </p:spPr>
+        <p:txBody>
+          <a:bodyPr wrap="square" lIns="0" tIns="0" rIns="0" bIns="0" rtlCol="0"/>
+          <a:lstStyle/>
+          <a:p>
+            <a:pPr indent="0" marL="0">
+              <a:buNone/>
+            </a:pPr>
+            <a:r>
+              <a:rPr lang="en-US" sz="1200" b="1" spc="200" kern="0" dirty="0">
+                <a:solidFill>
+                  <a:schemeClr val="accent1"/>
+                </a:solidFill>
+              </a:rPr>
+              <a:t>HOW I'D RUN THIS WITH A CUSTOMER</a:t>
+            </a:r>
+            <a:endParaRPr lang="en-US" sz="1200" dirty="0"/>
+          </a:p>
+        </p:txBody>
+      </p:sp>
+      <p:sp>
+        <p:nvSpPr>
+          <p:cNvPr id="3" name="Text 0"/>
+          <p:cNvSpPr/>
+          <p:nvPr>
+            <p:ph idx="101" type="title" hasCustomPrompt="1"/>
+          </p:nvPr>
+        </p:nvSpPr>
+        <p:spPr>
+          <a:xfrm>
             <a:off x="548640" y="868680"/>
             <a:ext cx="11094415" cy="822960"/>
           </a:xfrm>
@@ -9714,7 +12086,7 @@
       </p:sp>
       <p:sp>
         <p:nvSpPr>
-          <p:cNvPr id="4" name="card-332"/>
+          <p:cNvPr id="4" name="card-392"/>
           <p:cNvSpPr/>
           <p:nvPr/>
         </p:nvSpPr>
@@ -9741,7 +12113,7 @@
       </p:sp>
       <p:sp>
         <p:nvSpPr>
-          <p:cNvPr id="5" name="badge-333"/>
+          <p:cNvPr id="5" name="badge-393"/>
           <p:cNvSpPr/>
           <p:nvPr/>
         </p:nvSpPr>
@@ -9768,7 +12140,7 @@
       </p:sp>
       <p:sp>
         <p:nvSpPr>
-          <p:cNvPr id="6" name="badge-label-334"/>
+          <p:cNvPr id="6" name="badge-label-394"/>
           <p:cNvSpPr txBox="1"/>
           <p:nvPr/>
         </p:nvSpPr>
@@ -9807,7 +12179,7 @@
       </p:sp>
       <p:sp>
         <p:nvSpPr>
-          <p:cNvPr id="7" name="text-335"/>
+          <p:cNvPr id="7" name="text-395"/>
           <p:cNvSpPr txBox="1"/>
           <p:nvPr/>
         </p:nvSpPr>
@@ -9857,7 +12229,7 @@
       </p:sp>
       <p:sp>
         <p:nvSpPr>
-          <p:cNvPr id="8" name="arrow-336"/>
+          <p:cNvPr id="8" name="arrow-396"/>
           <p:cNvSpPr/>
           <p:nvPr/>
         </p:nvSpPr>
@@ -9881,7 +12253,7 @@
       </p:sp>
       <p:sp>
         <p:nvSpPr>
-          <p:cNvPr id="9" name="card-337"/>
+          <p:cNvPr id="9" name="card-397"/>
           <p:cNvSpPr/>
           <p:nvPr/>
         </p:nvSpPr>
@@ -9908,7 +12280,7 @@
       </p:sp>
       <p:sp>
         <p:nvSpPr>
-          <p:cNvPr id="10" name="badge-338"/>
+          <p:cNvPr id="10" name="badge-398"/>
           <p:cNvSpPr/>
           <p:nvPr/>
         </p:nvSpPr>
@@ -9935,7 +12307,7 @@
       </p:sp>
       <p:sp>
         <p:nvSpPr>
-          <p:cNvPr id="11" name="badge-label-339"/>
+          <p:cNvPr id="11" name="badge-label-399"/>
           <p:cNvSpPr txBox="1"/>
           <p:nvPr/>
         </p:nvSpPr>
@@ -9974,7 +12346,7 @@
       </p:sp>
       <p:sp>
         <p:nvSpPr>
-          <p:cNvPr id="12" name="text-340"/>
+          <p:cNvPr id="12" name="text-400"/>
           <p:cNvSpPr txBox="1"/>
           <p:nvPr/>
         </p:nvSpPr>
@@ -10024,7 +12396,7 @@
       </p:sp>
       <p:sp>
         <p:nvSpPr>
-          <p:cNvPr id="13" name="arrow-341"/>
+          <p:cNvPr id="13" name="arrow-401"/>
           <p:cNvSpPr/>
           <p:nvPr/>
         </p:nvSpPr>
@@ -10048,7 +12420,7 @@
       </p:sp>
       <p:sp>
         <p:nvSpPr>
-          <p:cNvPr id="14" name="card-342"/>
+          <p:cNvPr id="14" name="card-402"/>
           <p:cNvSpPr/>
           <p:nvPr/>
         </p:nvSpPr>
@@ -10075,7 +12447,7 @@
       </p:sp>
       <p:sp>
         <p:nvSpPr>
-          <p:cNvPr id="15" name="badge-343"/>
+          <p:cNvPr id="15" name="badge-403"/>
           <p:cNvSpPr/>
           <p:nvPr/>
         </p:nvSpPr>
@@ -10102,7 +12474,7 @@
       </p:sp>
       <p:sp>
         <p:nvSpPr>
-          <p:cNvPr id="16" name="badge-label-344"/>
+          <p:cNvPr id="16" name="badge-label-404"/>
           <p:cNvSpPr txBox="1"/>
           <p:nvPr/>
         </p:nvSpPr>
@@ -10141,7 +12513,7 @@
       </p:sp>
       <p:sp>
         <p:nvSpPr>
-          <p:cNvPr id="17" name="text-345"/>
+          <p:cNvPr id="17" name="text-405"/>
           <p:cNvSpPr txBox="1"/>
           <p:nvPr/>
         </p:nvSpPr>
@@ -10191,7 +12563,7 @@
       </p:sp>
       <p:sp>
         <p:nvSpPr>
-          <p:cNvPr id="18" name="arrow-346"/>
+          <p:cNvPr id="18" name="arrow-406"/>
           <p:cNvSpPr/>
           <p:nvPr/>
         </p:nvSpPr>
@@ -10215,7 +12587,7 @@
       </p:sp>
       <p:sp>
         <p:nvSpPr>
-          <p:cNvPr id="19" name="card-347"/>
+          <p:cNvPr id="19" name="card-407"/>
           <p:cNvSpPr/>
           <p:nvPr/>
         </p:nvSpPr>
@@ -10242,7 +12614,7 @@
       </p:sp>
       <p:sp>
         <p:nvSpPr>
-          <p:cNvPr id="20" name="badge-348"/>
+          <p:cNvPr id="20" name="badge-408"/>
           <p:cNvSpPr/>
           <p:nvPr/>
         </p:nvSpPr>
@@ -10269,7 +12641,7 @@
       </p:sp>
       <p:sp>
         <p:nvSpPr>
-          <p:cNvPr id="21" name="badge-label-349"/>
+          <p:cNvPr id="21" name="badge-label-409"/>
           <p:cNvSpPr txBox="1"/>
           <p:nvPr/>
         </p:nvSpPr>
@@ -10308,7 +12680,7 @@
       </p:sp>
       <p:sp>
         <p:nvSpPr>
-          <p:cNvPr id="22" name="text-350"/>
+          <p:cNvPr id="22" name="text-410"/>
           <p:cNvSpPr txBox="1"/>
           <p:nvPr/>
         </p:nvSpPr>
@@ -10358,7 +12730,7 @@
       </p:sp>
       <p:sp>
         <p:nvSpPr>
-          <p:cNvPr id="23" name="text-351"/>
+          <p:cNvPr id="23" name="text-411"/>
           <p:cNvSpPr txBox="1"/>
           <p:nvPr/>
         </p:nvSpPr>
@@ -10397,7 +12769,7 @@
       </p:sp>
       <p:sp>
         <p:nvSpPr>
-          <p:cNvPr id="24" name="text-352"/>
+          <p:cNvPr id="24" name="text-412"/>
           <p:cNvSpPr txBox="1"/>
           <p:nvPr/>
         </p:nvSpPr>
